--- a/kvcache/unified_kv_memory/统一异构KVCache存储池_第一方推理基础设施立项汇报_10页精美图表增强版_预审版_20260814.pptx
+++ b/kvcache/unified_kv_memory/统一异构KVCache存储池_第一方推理基础设施立项汇报_10页精美图表增强版_预审版_20260814.pptx
@@ -3335,7 +3335,7 @@
           <a:lstStyle/>
           <a:p>
             <a:pPr>
-              <a:defRPr sz="2600" b="1">
+              <a:defRPr sz="2500" b="1">
                 <a:solidFill>
                   <a:srgbClr val="1E3A8A"/>
                 </a:solidFill>
@@ -3359,7 +3359,7 @@
               </a:defRPr>
             </a:pPr>
             <a:r>
-              <a:t>打造面向国产 AI 硬件的统一异构状态管理与传输调度底座 · 打通底层通信原语到业务 SLO 闭环</a:t>
+              <a:t>基于 Mooncake 深度重构与架构增强的面向国产 AI 硬件统一异构 KVCache 存储与调度底座 · 打通底层通信原语到业务 SLO 闭环</a:t>
             </a:r>
           </a:p>
           <a:p>
@@ -3375,7 +3375,7 @@
               </a:defRPr>
             </a:pPr>
             <a:r>
-              <a:t>从“框架内临时 Buffer”到“集群级高价值状态资产”——深入微架构协同，实现首字延迟降低、容量扩展与安全闭环</a:t>
+              <a:t>从“开源通用传输组件”到“面向国产 AI 硬件的原厂软硬件协同状态存储池”——以客观实测数据为依据，实现首字延迟降低、容量扩展与安全闭环</a:t>
             </a:r>
           </a:p>
         </p:txBody>
@@ -3475,7 +3475,7 @@
               </a:defRPr>
             </a:pPr>
             <a:r>
-              <a:t>深入 UBMEM / URMA 底层原语</a:t>
+              <a:t>深入 UBMEM / URMA 底层原语与描述符编译</a:t>
             </a:r>
           </a:p>
           <a:p>
@@ -3494,7 +3494,7 @@
               </a:defRPr>
             </a:pPr>
             <a:r>
-              <a:t>• 拓扑亲和映射：</a:t>
+              <a:t>• 语义拓扑亲和映射：</a:t>
             </a:r>
             <a:r>
               <a:rPr sz="1050" b="0">
@@ -3503,7 +3503,7 @@
                 </a:solidFill>
                 <a:latin typeface="Microsoft YaHei"/>
               </a:rPr>
-              <a:t>压减 80% 跨机架流量，从物理源头消除网络 Incast 拥塞与长尾抖动。</a:t>
+              <a:t>连续 Extent 编译消除 64KB Spraying 缺陷，从物理源头消灭 Incast 拥塞。</a:t>
             </a:r>
           </a:p>
           <a:p>
@@ -3522,7 +3522,7 @@
               </a:defRPr>
             </a:pPr>
             <a:r>
-              <a:t>• 双 Stream 物理流水：</a:t>
+              <a:t>• 双 Stream 硬件流水：</a:t>
             </a:r>
             <a:r>
               <a:rPr sz="1050" b="0">
@@ -3531,7 +3531,7 @@
                 </a:solidFill>
                 <a:latin typeface="Microsoft YaHei"/>
               </a:rPr>
-              <a:t>AICore 计算与 URMA 传输解耦，隐藏 ≥60% 网络跨节点传输耗时。</a:t>
+              <a:t>AICore 计算与 URMA 传输解耦，隐藏 ≥60% 跨节点传输耗时。</a:t>
             </a:r>
           </a:p>
         </p:txBody>
@@ -3650,7 +3650,7 @@
               </a:defRPr>
             </a:pPr>
             <a:r>
-              <a:t>• CPU 零数据拷贝：</a:t>
+              <a:t>• Host CPU 零数据拷贝：</a:t>
             </a:r>
             <a:r>
               <a:rPr sz="1050" b="0">
@@ -3659,7 +3659,7 @@
                 </a:solidFill>
                 <a:latin typeface="Microsoft YaHei"/>
               </a:rPr>
-              <a:t>控制面仅下发指令，正文数据 100% 绕过 Host CPU 与内存，消除中转瓶颈。</a:t>
+              <a:t>CPU 仅负责下发控制指令，数据搬运 100% 硬件直达，Payload 严格为 0。</a:t>
             </a:r>
           </a:p>
           <a:p>
@@ -3787,7 +3787,7 @@
               </a:defRPr>
             </a:pPr>
             <a:r>
-              <a:t>严格语义一致性校验与显式租约</a:t>
+              <a:t>6 维语义一致性校验与显式租约守卫</a:t>
             </a:r>
           </a:p>
           <a:p>
@@ -3806,7 +3806,7 @@
               </a:defRPr>
             </a:pPr>
             <a:r>
-              <a:t>• 前置动态收益决策：</a:t>
+              <a:t>• 微秒级动态 ROI 决策：</a:t>
             </a:r>
             <a:r>
               <a:rPr sz="1050" b="0">
@@ -3815,7 +3815,7 @@
                 </a:solidFill>
                 <a:latin typeface="Microsoft YaHei"/>
               </a:rPr>
-              <a:t>查表阶段量化评估，确保每次加载获明确净收益，无收益主动重算。</a:t>
+              <a:t>QueryPlan 前置量化评估，确保每一次加载获明确加速，无收益主动重算。</a:t>
             </a:r>
           </a:p>
           <a:p>
@@ -3834,7 +3834,7 @@
               </a:defRPr>
             </a:pPr>
             <a:r>
-              <a:t>• 语义一致性屏障：</a:t>
+              <a:t>• 显式租约安全屏障：</a:t>
             </a:r>
             <a:r>
               <a:rPr sz="1050" b="0">
@@ -3843,7 +3843,7 @@
                 </a:solidFill>
                 <a:latin typeface="Microsoft YaHei"/>
               </a:rPr>
-              <a:t>严格校验模型、词表、模板与租约有效性，实现多卡原子协同无死锁。</a:t>
+              <a:t>严格校验模型、词表、模板与租约有效性，张量并行多卡同步 0 死锁。</a:t>
             </a:r>
           </a:p>
         </p:txBody>
@@ -3940,7 +3940,7 @@
               </a:defRPr>
             </a:pPr>
             <a:r>
-              <a:t>实施准则：规划 4～5 周敏捷原型验证 (PVT/CVT) · 严格按 E0～E3 阶段门禁逐级推进研发投入与 No-Go 安全止损</a:t>
+              <a:t>实施准则：基于 Mooncake 深度重构与架构增强 · 规划 4～5 周敏捷原型验证 · 严格按四个核心验证阶段 (E0～E3) 门禁推进与安全止损</a:t>
             </a:r>
           </a:p>
         </p:txBody>
@@ -3994,7 +3994,7 @@
           <a:lstStyle/>
           <a:p>
             <a:pPr>
-              <a:defRPr sz="1900" b="1">
+              <a:defRPr sz="1800" b="1">
                 <a:solidFill>
                   <a:srgbClr val="1E3A8A"/>
                 </a:solidFill>
@@ -4112,8 +4112,8 @@
         </p:nvSpPr>
         <p:spPr>
           <a:xfrm>
-            <a:off x="658368" y="1133856"/>
-            <a:ext cx="3291840" cy="1883664"/>
+            <a:off x="621792" y="1115568"/>
+            <a:ext cx="3364992" cy="1920240"/>
           </a:xfrm>
           <a:prstGeom prst="rect">
             <a:avLst/>
@@ -4141,12 +4141,12 @@
           <a:p>
             <a:pPr>
               <a:spcBef>
-                <a:spcPts val="100"/>
+                <a:spcPts val="200"/>
               </a:spcBef>
               <a:spcAft>
-                <a:spcPts val="200"/>
+                <a:spcPts val="600"/>
               </a:spcAft>
-              <a:defRPr sz="1000" b="1">
+              <a:defRPr sz="1050" b="1">
                 <a:solidFill>
                   <a:srgbClr val="475569"/>
                 </a:solidFill>
@@ -4159,10 +4159,13 @@
           </a:p>
           <a:p>
             <a:pPr>
+              <a:lnSpc>
+                <a:spcPct val="122000"/>
+              </a:lnSpc>
               <a:spcBef>
-                <a:spcPts val="200"/>
+                <a:spcPts val="600"/>
               </a:spcBef>
-              <a:defRPr sz="1100" b="1">
+              <a:defRPr sz="1200" b="1">
                 <a:solidFill>
                   <a:srgbClr val="1E3A8A"/>
                 </a:solidFill>
@@ -4173,21 +4176,24 @@
               <a:t>✔ P99 TTFT 改善 ≥20%：</a:t>
             </a:r>
             <a:r>
-              <a:rPr sz="1050" b="0">
+              <a:rPr sz="1150" b="0">
                 <a:solidFill>
                   <a:srgbClr val="475569"/>
                 </a:solidFill>
                 <a:latin typeface="Microsoft YaHei"/>
               </a:rPr>
-              <a:t>URMA 硬件高优 QoS 队列隔离与前台带宽保留</a:t>
-            </a:r>
-          </a:p>
-          <a:p>
-            <a:pPr>
+              <a:t>URMA 硬件高优 QoS 队列与前台带宽保留</a:t>
+            </a:r>
+          </a:p>
+          <a:p>
+            <a:pPr>
+              <a:lnSpc>
+                <a:spcPct val="122000"/>
+              </a:lnSpc>
               <a:spcBef>
-                <a:spcPts val="200"/>
+                <a:spcPts val="600"/>
               </a:spcBef>
-              <a:defRPr sz="1100" b="1">
+              <a:defRPr sz="1200" b="1">
                 <a:solidFill>
                   <a:srgbClr val="1E3A8A"/>
                 </a:solidFill>
@@ -4198,21 +4204,24 @@
               <a:t>✔ P99 TPOT 抖动 &lt; 3%：</a:t>
             </a:r>
             <a:r>
-              <a:rPr sz="1050" b="0">
+              <a:rPr sz="1150" b="0">
                 <a:solidFill>
                   <a:srgbClr val="475569"/>
                 </a:solidFill>
                 <a:latin typeface="Microsoft YaHei"/>
               </a:rPr>
-              <a:t>AICore 与 URMA 双 Stream 解耦流水 + 快速注意力在线融合</a:t>
-            </a:r>
-          </a:p>
-          <a:p>
-            <a:pPr>
+              <a:t>算力与传输双流解耦 + 注意力在线融合</a:t>
+            </a:r>
+          </a:p>
+          <a:p>
+            <a:pPr>
+              <a:lnSpc>
+                <a:spcPct val="122000"/>
+              </a:lnSpc>
               <a:spcBef>
-                <a:spcPts val="200"/>
+                <a:spcPts val="600"/>
               </a:spcBef>
-              <a:defRPr sz="1100" b="1">
+              <a:defRPr sz="1200" b="1">
                 <a:solidFill>
                   <a:srgbClr val="1E3A8A"/>
                 </a:solidFill>
@@ -4220,16 +4229,16 @@
               </a:defRPr>
             </a:pPr>
             <a:r>
-              <a:t>✔ 传输 P99 膨胀 ≤ 2.0 倍：</a:t>
-            </a:r>
-            <a:r>
-              <a:rPr sz="1050" b="0">
+              <a:t>✔ 传输 P99 膨胀 ≤ 2.0x：</a:t>
+            </a:r>
+            <a:r>
+              <a:rPr sz="1150" b="0">
                 <a:solidFill>
                   <a:srgbClr val="475569"/>
                 </a:solidFill>
                 <a:latin typeface="Microsoft YaHei"/>
               </a:rPr>
-              <a:t>实时时延观测、队列深度监控与自适应重算熔断</a:t>
+              <a:t>实时时延观测、队列监控与自适应熔断</a:t>
             </a:r>
           </a:p>
         </p:txBody>
@@ -4287,8 +4296,8 @@
         </p:nvSpPr>
         <p:spPr>
           <a:xfrm>
-            <a:off x="4398264" y="1133856"/>
-            <a:ext cx="3291840" cy="1883664"/>
+            <a:off x="4361688" y="1115568"/>
+            <a:ext cx="3364992" cy="1920240"/>
           </a:xfrm>
           <a:prstGeom prst="rect">
             <a:avLst/>
@@ -4316,12 +4325,12 @@
           <a:p>
             <a:pPr>
               <a:spcBef>
-                <a:spcPts val="100"/>
+                <a:spcPts val="200"/>
               </a:spcBef>
               <a:spcAft>
-                <a:spcPts val="200"/>
+                <a:spcPts val="600"/>
               </a:spcAft>
-              <a:defRPr sz="1000" b="1">
+              <a:defRPr sz="1050" b="1">
                 <a:solidFill>
                   <a:srgbClr val="475569"/>
                 </a:solidFill>
@@ -4334,10 +4343,13 @@
           </a:p>
           <a:p>
             <a:pPr>
+              <a:lnSpc>
+                <a:spcPct val="122000"/>
+              </a:lnSpc>
               <a:spcBef>
-                <a:spcPts val="200"/>
+                <a:spcPts val="600"/>
               </a:spcBef>
-              <a:defRPr sz="1100" b="1">
+              <a:defRPr sz="1200" b="1">
                 <a:solidFill>
                   <a:srgbClr val="1E3A8A"/>
                 </a:solidFill>
@@ -4348,21 +4360,24 @@
               <a:t>✔ 有效请求成本 ↓≥35%：</a:t>
             </a:r>
             <a:r>
-              <a:rPr sz="1050" b="0">
+              <a:rPr sz="1150" b="0">
                 <a:solidFill>
                   <a:srgbClr val="475569"/>
                 </a:solidFill>
                 <a:latin typeface="Microsoft YaHei"/>
               </a:rPr>
-              <a:t>CPU 零数据拷贝，单机推理解算密度提升 40%</a:t>
-            </a:r>
-          </a:p>
-          <a:p>
-            <a:pPr>
+              <a:t>CPU 零数据拷贝，单机计算密度提升 40%</a:t>
+            </a:r>
+          </a:p>
+          <a:p>
+            <a:pPr>
+              <a:lnSpc>
+                <a:spcPct val="122000"/>
+              </a:lnSpc>
               <a:spcBef>
-                <a:spcPts val="200"/>
+                <a:spcPts val="600"/>
               </a:spcBef>
-              <a:defRPr sz="1100" b="1">
+              <a:defRPr sz="1200" b="1">
                 <a:solidFill>
                   <a:srgbClr val="1E3A8A"/>
                 </a:solidFill>
@@ -4373,21 +4388,24 @@
               <a:t>✔ NPU 算力浪费压降：</a:t>
             </a:r>
             <a:r>
-              <a:rPr sz="1050" b="0">
+              <a:rPr sz="1150" b="0">
                 <a:solidFill>
                   <a:srgbClr val="475569"/>
                 </a:solidFill>
                 <a:latin typeface="Microsoft YaHei"/>
               </a:rPr>
-              <a:t>前置动态收益评估引擎，无收益时主动转本地重算</a:t>
-            </a:r>
-          </a:p>
-          <a:p>
-            <a:pPr>
+              <a:t>动态选路决策引擎，无收益时主动转本地重算</a:t>
+            </a:r>
+          </a:p>
+          <a:p>
+            <a:pPr>
+              <a:lnSpc>
+                <a:spcPct val="122000"/>
+              </a:lnSpc>
               <a:spcBef>
-                <a:spcPts val="200"/>
+                <a:spcPts val="600"/>
               </a:spcBef>
-              <a:defRPr sz="1100" b="1">
+              <a:defRPr sz="1200" b="1">
                 <a:solidFill>
                   <a:srgbClr val="1E3A8A"/>
                 </a:solidFill>
@@ -4395,16 +4413,16 @@
               </a:defRPr>
             </a:pPr>
             <a:r>
-              <a:t>✔ 按时达标合格率提升：</a:t>
-            </a:r>
-            <a:r>
-              <a:rPr sz="1050" b="0">
+              <a:t>✔ 按时达标率显著提升：</a:t>
+            </a:r>
+            <a:r>
+              <a:rPr sz="1150" b="0">
                 <a:solidFill>
                   <a:srgbClr val="475569"/>
                 </a:solidFill>
                 <a:latin typeface="Microsoft YaHei"/>
               </a:rPr>
-              <a:t>压制长尾时延抖动，使满足延时要求的有效请求比例由 95% 提升至 98%</a:t>
+              <a:t>压制长尾抖动，SLO 达标率由 95% 提至 98%</a:t>
             </a:r>
           </a:p>
         </p:txBody>
@@ -4462,8 +4480,8 @@
         </p:nvSpPr>
         <p:spPr>
           <a:xfrm>
-            <a:off x="8138160" y="1133856"/>
-            <a:ext cx="3291840" cy="1883664"/>
+            <a:off x="8101584" y="1115568"/>
+            <a:ext cx="3364992" cy="1920240"/>
           </a:xfrm>
           <a:prstGeom prst="rect">
             <a:avLst/>
@@ -4491,12 +4509,12 @@
           <a:p>
             <a:pPr>
               <a:spcBef>
-                <a:spcPts val="100"/>
+                <a:spcPts val="200"/>
               </a:spcBef>
               <a:spcAft>
-                <a:spcPts val="200"/>
+                <a:spcPts val="600"/>
               </a:spcAft>
-              <a:defRPr sz="1000" b="1">
+              <a:defRPr sz="1050" b="1">
                 <a:solidFill>
                   <a:srgbClr val="475569"/>
                 </a:solidFill>
@@ -4509,10 +4527,13 @@
           </a:p>
           <a:p>
             <a:pPr>
+              <a:lnSpc>
+                <a:spcPct val="122000"/>
+              </a:lnSpc>
               <a:spcBef>
-                <a:spcPts val="200"/>
+                <a:spcPts val="600"/>
               </a:spcBef>
-              <a:defRPr sz="1100" b="1">
+              <a:defRPr sz="1200" b="1">
                 <a:solidFill>
                   <a:srgbClr val="1E3A8A"/>
                 </a:solidFill>
@@ -4523,7 +4544,7 @@
               <a:t>✔ HBM 有效容量 ↑≥30%：</a:t>
             </a:r>
             <a:r>
-              <a:rPr sz="1050" b="0">
+              <a:rPr sz="1150" b="0">
                 <a:solidFill>
                   <a:srgbClr val="475569"/>
                 </a:solidFill>
@@ -4534,10 +4555,13 @@
           </a:p>
           <a:p>
             <a:pPr>
+              <a:lnSpc>
+                <a:spcPct val="122000"/>
+              </a:lnSpc>
               <a:spcBef>
-                <a:spcPts val="200"/>
+                <a:spcPts val="600"/>
               </a:spcBef>
-              <a:defRPr sz="1100" b="1">
+              <a:defRPr sz="1200" b="1">
                 <a:solidFill>
                   <a:srgbClr val="1E3A8A"/>
                 </a:solidFill>
@@ -4548,21 +4572,24 @@
               <a:t>✔ 错误消费事故率 = 0：</a:t>
             </a:r>
             <a:r>
-              <a:rPr sz="1050" b="0">
+              <a:rPr sz="1150" b="0">
                 <a:solidFill>
                   <a:srgbClr val="475569"/>
                 </a:solidFill>
                 <a:latin typeface="Microsoft YaHei"/>
               </a:rPr>
-              <a:t>严格语义一致性校验与显式租约安全屏障</a:t>
-            </a:r>
-          </a:p>
-          <a:p>
-            <a:pPr>
+              <a:t>6 维语义一致性校验与显式租约安全屏障</a:t>
+            </a:r>
+          </a:p>
+          <a:p>
+            <a:pPr>
+              <a:lnSpc>
+                <a:spcPct val="122000"/>
+              </a:lnSpc>
               <a:spcBef>
-                <a:spcPts val="200"/>
+                <a:spcPts val="600"/>
               </a:spcBef>
-              <a:defRPr sz="1100" b="1">
+              <a:defRPr sz="1200" b="1">
                 <a:solidFill>
                   <a:srgbClr val="1E3A8A"/>
                 </a:solidFill>
@@ -4570,16 +4597,16 @@
               </a:defRPr>
             </a:pPr>
             <a:r>
-              <a:t>✔ 负收益 / 迟到加载 &lt; 1%：</a:t>
-            </a:r>
-            <a:r>
-              <a:rPr sz="1050" b="0">
+              <a:t>✔ 负收益/迟到加载 &lt; 1%：</a:t>
+            </a:r>
+            <a:r>
+              <a:rPr sz="1150" b="0">
                 <a:solidFill>
                   <a:srgbClr val="475569"/>
                 </a:solidFill>
                 <a:latin typeface="Microsoft YaHei"/>
               </a:rPr>
-              <a:t>多卡状态原子并发组选路，消除跨卡等待</a:t>
+              <a:t>张量并行多卡状态同步协同，消除跨卡死锁</a:t>
             </a:r>
           </a:p>
         </p:txBody>
@@ -4627,7 +4654,7 @@
                       </a:r>
                     </a:p>
                   </a:txBody>
-                  <a:tcPr>
+                  <a:tcPr anchor="ctr">
                     <a:solidFill>
                       <a:srgbClr val="1E3A8A"/>
                     </a:solidFill>
@@ -4647,11 +4674,11 @@
                         </a:defRPr>
                       </a:pPr>
                       <a:r>
-                        <a:t>传统开源方案现状 (Open Source)</a:t>
+                        <a:t>原生 Mooncake 现状 (Baseline)</a:t>
                       </a:r>
                     </a:p>
                   </a:txBody>
-                  <a:tcPr>
+                  <a:tcPr anchor="ctr">
                     <a:solidFill>
                       <a:srgbClr val="1E3A8A"/>
                     </a:solidFill>
@@ -4671,11 +4698,11 @@
                         </a:defRPr>
                       </a:pPr>
                       <a:r>
-                        <a:t>本项目软硬件协同方案 (Unified KV)</a:t>
+                        <a:t>软硬件协同方案 (Unified KV)</a:t>
                       </a:r>
                     </a:p>
                   </a:txBody>
-                  <a:tcPr>
+                  <a:tcPr anchor="ctr">
                     <a:solidFill>
                       <a:srgbClr val="1E3A8A"/>
                     </a:solidFill>
@@ -4699,7 +4726,7 @@
                       </a:r>
                     </a:p>
                   </a:txBody>
-                  <a:tcPr>
+                  <a:tcPr anchor="ctr">
                     <a:solidFill>
                       <a:srgbClr val="1E3A8A"/>
                     </a:solidFill>
@@ -4732,7 +4759,7 @@
                       </a:r>
                     </a:p>
                   </a:txBody>
-                  <a:tcPr>
+                  <a:tcPr anchor="ctr">
                     <a:solidFill>
                       <a:srgbClr val="FFFFFF"/>
                     </a:solidFill>
@@ -4767,7 +4794,7 @@
                       </a:r>
                     </a:p>
                   </a:txBody>
-                  <a:tcPr>
+                  <a:tcPr anchor="ctr">
                     <a:solidFill>
                       <a:srgbClr val="FFFFFF"/>
                     </a:solidFill>
@@ -4802,7 +4829,7 @@
                       </a:r>
                     </a:p>
                   </a:txBody>
-                  <a:tcPr>
+                  <a:tcPr anchor="ctr">
                     <a:solidFill>
                       <a:srgbClr val="FFFFFF"/>
                     </a:solidFill>
@@ -4837,7 +4864,7 @@
                       </a:r>
                     </a:p>
                   </a:txBody>
-                  <a:tcPr>
+                  <a:tcPr anchor="ctr">
                     <a:solidFill>
                       <a:srgbClr val="FFFFFF"/>
                     </a:solidFill>
@@ -4870,7 +4897,7 @@
                       </a:r>
                     </a:p>
                   </a:txBody>
-                  <a:tcPr>
+                  <a:tcPr anchor="ctr">
                     <a:solidFill>
                       <a:srgbClr val="F1F5F9"/>
                     </a:solidFill>
@@ -4905,7 +4932,7 @@
                       </a:r>
                     </a:p>
                   </a:txBody>
-                  <a:tcPr>
+                  <a:tcPr anchor="ctr">
                     <a:solidFill>
                       <a:srgbClr val="F1F5F9"/>
                     </a:solidFill>
@@ -4940,7 +4967,7 @@
                       </a:r>
                     </a:p>
                   </a:txBody>
-                  <a:tcPr>
+                  <a:tcPr anchor="ctr">
                     <a:solidFill>
                       <a:srgbClr val="F1F5F9"/>
                     </a:solidFill>
@@ -4975,7 +5002,7 @@
                       </a:r>
                     </a:p>
                   </a:txBody>
-                  <a:tcPr>
+                  <a:tcPr anchor="ctr">
                     <a:solidFill>
                       <a:srgbClr val="F1F5F9"/>
                     </a:solidFill>
@@ -5008,7 +5035,7 @@
                       </a:r>
                     </a:p>
                   </a:txBody>
-                  <a:tcPr>
+                  <a:tcPr anchor="ctr">
                     <a:solidFill>
                       <a:srgbClr val="FFFFFF"/>
                     </a:solidFill>
@@ -5043,7 +5070,7 @@
                       </a:r>
                     </a:p>
                   </a:txBody>
-                  <a:tcPr>
+                  <a:tcPr anchor="ctr">
                     <a:solidFill>
                       <a:srgbClr val="FFFFFF"/>
                     </a:solidFill>
@@ -5078,7 +5105,7 @@
                       </a:r>
                     </a:p>
                   </a:txBody>
-                  <a:tcPr>
+                  <a:tcPr anchor="ctr">
                     <a:solidFill>
                       <a:srgbClr val="FFFFFF"/>
                     </a:solidFill>
@@ -5113,7 +5140,7 @@
                       </a:r>
                     </a:p>
                   </a:txBody>
-                  <a:tcPr>
+                  <a:tcPr anchor="ctr">
                     <a:solidFill>
                       <a:srgbClr val="FFFFFF"/>
                     </a:solidFill>
@@ -5372,7 +5399,7 @@
           <a:lstStyle/>
           <a:p>
             <a:pPr>
-              <a:defRPr sz="1900" b="1">
+              <a:defRPr sz="1800" b="1">
                 <a:solidFill>
                   <a:srgbClr val="1E3A8A"/>
                 </a:solidFill>
@@ -5396,7 +5423,7 @@
               </a:defRPr>
             </a:pPr>
             <a:r>
-              <a:t>规划 4～5 周敏捷验证，包含 8 项核心验证 (PVT) 与 3 项可行性证伪 (CVT)，按 E0～E3 门禁逐级推进</a:t>
+              <a:t>规划 4～5 周敏捷验证，包含 8 项核心验证 (PVT) 与 3 项可行性证伪 (CVT)，按四个核心验证阶段 (E0～E3) 门禁逐级推进</a:t>
             </a:r>
           </a:p>
         </p:txBody>
@@ -5806,8 +5833,8 @@
         </p:nvSpPr>
         <p:spPr>
           <a:xfrm>
-            <a:off x="658368" y="1645920"/>
-            <a:ext cx="2414016" cy="2944368"/>
+            <a:off x="621792" y="1627632"/>
+            <a:ext cx="2487168" cy="2980944"/>
           </a:xfrm>
           <a:prstGeom prst="rect">
             <a:avLst/>
@@ -5822,9 +5849,9 @@
           <a:p>
             <a:pPr>
               <a:spcAft>
-                <a:spcPts val="200"/>
+                <a:spcPts val="400"/>
               </a:spcAft>
-              <a:defRPr sz="1150" b="1">
+              <a:defRPr sz="1200" b="1">
                 <a:solidFill>
                   <a:srgbClr val="1E3A8A"/>
                 </a:solidFill>
@@ -5838,12 +5865,12 @@
           <a:p>
             <a:pPr>
               <a:lnSpc>
-                <a:spcPct val="118000"/>
+                <a:spcPct val="122000"/>
               </a:lnSpc>
               <a:spcBef>
-                <a:spcPts val="400"/>
+                <a:spcPts val="600"/>
               </a:spcBef>
-              <a:defRPr sz="1100" b="1">
+              <a:defRPr sz="1150" b="1">
                 <a:solidFill>
                   <a:srgbClr val="0F172A"/>
                 </a:solidFill>
@@ -5851,27 +5878,27 @@
               </a:defRPr>
             </a:pPr>
             <a:r>
-              <a:t>▶ 业务收益上限评估 (PVT-00)：</a:t>
-            </a:r>
-            <a:r>
-              <a:rPr sz="1050" b="0">
+              <a:t>▶ 业务复用上限 (PVT-00)：</a:t>
+            </a:r>
+            <a:r>
+              <a:rPr sz="1100" b="0">
                 <a:solidFill>
                   <a:srgbClr val="475569"/>
                 </a:solidFill>
                 <a:latin typeface="Microsoft YaHei"/>
               </a:rPr>
-              <a:t>评估目标业务流量 Saved-Prefill（首字预计算节省）上限，探明复用分布。</a:t>
+              <a:t>评估 Saved-Prefill 节省上限与复用分布。</a:t>
             </a:r>
           </a:p>
           <a:p>
             <a:pPr>
               <a:lnSpc>
-                <a:spcPct val="118000"/>
+                <a:spcPct val="122000"/>
               </a:lnSpc>
               <a:spcBef>
-                <a:spcPts val="400"/>
+                <a:spcPts val="600"/>
               </a:spcBef>
-              <a:defRPr sz="1100" b="1">
+              <a:defRPr sz="1150" b="1">
                 <a:solidFill>
                   <a:srgbClr val="0F172A"/>
                 </a:solidFill>
@@ -5882,24 +5909,24 @@
               <a:t>▶ 零数据拷贝底座 (PVT-01)：</a:t>
             </a:r>
             <a:r>
-              <a:rPr sz="1050" b="0">
+              <a:rPr sz="1100" b="0">
                 <a:solidFill>
                   <a:srgbClr val="475569"/>
                 </a:solidFill>
                 <a:latin typeface="Microsoft YaHei"/>
               </a:rPr>
-              <a:t>验证 HBM / DDR / SSD 真实可达性，建立 CapabilityMatrix（硬件能力矩阵）。</a:t>
+              <a:t>验证 HBM/DDR/SSD 可达性与硬件能力。</a:t>
             </a:r>
           </a:p>
           <a:p>
             <a:pPr>
               <a:lnSpc>
-                <a:spcPct val="118000"/>
+                <a:spcPct val="122000"/>
               </a:lnSpc>
               <a:spcBef>
-                <a:spcPts val="400"/>
+                <a:spcPts val="600"/>
               </a:spcBef>
-              <a:defRPr sz="1100" b="1">
+              <a:defRPr sz="1150" b="1">
                 <a:solidFill>
                   <a:srgbClr val="0F172A"/>
                 </a:solidFill>
@@ -5910,13 +5937,13 @@
               <a:t>▶ E0/E1 阶段目标：</a:t>
             </a:r>
             <a:r>
-              <a:rPr sz="1050" b="0">
+              <a:rPr sz="1100" b="0">
                 <a:solidFill>
                   <a:srgbClr val="475569"/>
                 </a:solidFill>
                 <a:latin typeface="Microsoft YaHei"/>
               </a:rPr>
-              <a:t>确认业务具备复用收益空间，底层硬件通信路径与观测闭环打通。</a:t>
+              <a:t>确认业务复用收益空间，打通通信观测闭环。</a:t>
             </a:r>
           </a:p>
         </p:txBody>
@@ -5974,8 +6001,8 @@
         </p:nvSpPr>
         <p:spPr>
           <a:xfrm>
-            <a:off x="3474720" y="1645920"/>
-            <a:ext cx="2414016" cy="2944368"/>
+            <a:off x="3438144" y="1627632"/>
+            <a:ext cx="2487168" cy="2980944"/>
           </a:xfrm>
           <a:prstGeom prst="rect">
             <a:avLst/>
@@ -5990,9 +6017,9 @@
           <a:p>
             <a:pPr>
               <a:spcAft>
-                <a:spcPts val="200"/>
+                <a:spcPts val="400"/>
               </a:spcAft>
-              <a:defRPr sz="1150" b="1">
+              <a:defRPr sz="1200" b="1">
                 <a:solidFill>
                   <a:srgbClr val="1D4ED8"/>
                 </a:solidFill>
@@ -6006,12 +6033,12 @@
           <a:p>
             <a:pPr>
               <a:lnSpc>
-                <a:spcPct val="118000"/>
+                <a:spcPct val="122000"/>
               </a:lnSpc>
               <a:spcBef>
-                <a:spcPts val="400"/>
+                <a:spcPts val="600"/>
               </a:spcBef>
-              <a:defRPr sz="1100" b="1">
+              <a:defRPr sz="1150" b="1">
                 <a:solidFill>
                   <a:srgbClr val="0F172A"/>
                 </a:solidFill>
@@ -6022,24 +6049,24 @@
               <a:t>▶ 异步流水编译 (PVT-02)：</a:t>
             </a:r>
             <a:r>
-              <a:rPr sz="1050" b="0">
+              <a:rPr sz="1100" b="0">
                 <a:solidFill>
                   <a:srgbClr val="475569"/>
                 </a:solidFill>
                 <a:latin typeface="Microsoft YaHei"/>
               </a:rPr>
-              <a:t>异构框架 Layout 编译器与异步流水验证，算力与传输重叠率 ≥60%。</a:t>
+              <a:t>异构 Layout 编译，算力传输重叠 ≥60%。</a:t>
             </a:r>
           </a:p>
           <a:p>
             <a:pPr>
               <a:lnSpc>
-                <a:spcPct val="118000"/>
+                <a:spcPct val="122000"/>
               </a:lnSpc>
               <a:spcBef>
-                <a:spcPts val="400"/>
+                <a:spcPts val="600"/>
               </a:spcBef>
-              <a:defRPr sz="1100" b="1">
+              <a:defRPr sz="1150" b="1">
                 <a:solidFill>
                   <a:srgbClr val="0F172A"/>
                 </a:solidFill>
@@ -6050,24 +6077,24 @@
               <a:t>▶ 共享总线快路径 (PVT-03)：</a:t>
             </a:r>
             <a:r>
-              <a:rPr sz="1050" b="0">
+              <a:rPr sz="1100" b="0">
                 <a:solidFill>
                   <a:srgbClr val="475569"/>
                 </a:solidFill>
                 <a:latin typeface="Microsoft YaHei"/>
               </a:rPr>
-              <a:t>验证 UBMEM 元数据快路径与容错边界，完整查询 P99 &lt; 5 µs。</a:t>
+              <a:t>验证 UBMEM 快路径，保持微秒级响应。</a:t>
             </a:r>
           </a:p>
           <a:p>
             <a:pPr>
               <a:lnSpc>
-                <a:spcPct val="118000"/>
+                <a:spcPct val="122000"/>
               </a:lnSpc>
               <a:spcBef>
-                <a:spcPts val="400"/>
+                <a:spcPts val="600"/>
               </a:spcBef>
-              <a:defRPr sz="1100" b="1">
+              <a:defRPr sz="1150" b="1">
                 <a:solidFill>
                   <a:srgbClr val="0F172A"/>
                 </a:solidFill>
@@ -6075,16 +6102,16 @@
               </a:defRPr>
             </a:pPr>
             <a:r>
-              <a:t>▶ 动态决策引擎 (PVT-04)：</a:t>
-            </a:r>
-            <a:r>
-              <a:rPr sz="1050" b="0">
+              <a:t>▶ 动态选路决策 (PVT-04)：</a:t>
+            </a:r>
+            <a:r>
+              <a:rPr sz="1100" b="0">
                 <a:solidFill>
                   <a:srgbClr val="475569"/>
                 </a:solidFill>
                 <a:latin typeface="Microsoft YaHei"/>
               </a:rPr>
-              <a:t>验证 QueryPlan 微秒级选路与成本预估，决策准确率 &gt; 95%。</a:t>
+              <a:t>验证微秒级选路决策，决策准确率 &gt; 95%。</a:t>
             </a:r>
           </a:p>
         </p:txBody>
@@ -6142,8 +6169,8 @@
         </p:nvSpPr>
         <p:spPr>
           <a:xfrm>
-            <a:off x="6291072" y="1645920"/>
-            <a:ext cx="2414016" cy="2944368"/>
+            <a:off x="6254496" y="1627632"/>
+            <a:ext cx="2487168" cy="2980944"/>
           </a:xfrm>
           <a:prstGeom prst="rect">
             <a:avLst/>
@@ -6158,9 +6185,9 @@
           <a:p>
             <a:pPr>
               <a:spcAft>
-                <a:spcPts val="200"/>
+                <a:spcPts val="400"/>
               </a:spcAft>
-              <a:defRPr sz="1150" b="1">
+              <a:defRPr sz="1200" b="1">
                 <a:solidFill>
                   <a:srgbClr val="1E3A8A"/>
                 </a:solidFill>
@@ -6174,12 +6201,12 @@
           <a:p>
             <a:pPr>
               <a:lnSpc>
-                <a:spcPct val="118000"/>
+                <a:spcPct val="122000"/>
               </a:lnSpc>
               <a:spcBef>
-                <a:spcPts val="400"/>
+                <a:spcPts val="600"/>
               </a:spcBef>
-              <a:defRPr sz="1100" b="1">
+              <a:defRPr sz="1150" b="1">
                 <a:solidFill>
                   <a:srgbClr val="0F172A"/>
                 </a:solidFill>
@@ -6190,24 +6217,24 @@
               <a:t>▶ HBM-SSD 直达 (PVT-05)：</a:t>
             </a:r>
             <a:r>
-              <a:rPr sz="1050" b="0">
+              <a:rPr sz="1100" b="0">
                 <a:solidFill>
                   <a:srgbClr val="475569"/>
                 </a:solidFill>
                 <a:latin typeface="Microsoft YaHei"/>
               </a:rPr>
-              <a:t>验证 Direct PCIe DMA 容量主路径，确立 DDR 辅助缓冲角色退出准则。</a:t>
+              <a:t>Direct DMA 容量主路径与 DDR 退出准则。</a:t>
             </a:r>
           </a:p>
           <a:p>
             <a:pPr>
               <a:lnSpc>
-                <a:spcPct val="118000"/>
+                <a:spcPct val="122000"/>
               </a:lnSpc>
               <a:spcBef>
-                <a:spcPts val="400"/>
+                <a:spcPts val="600"/>
               </a:spcBef>
-              <a:defRPr sz="1100" b="1">
+              <a:defRPr sz="1150" b="1">
                 <a:solidFill>
                   <a:srgbClr val="0F172A"/>
                 </a:solidFill>
@@ -6215,27 +6242,27 @@
               </a:defRPr>
             </a:pPr>
             <a:r>
-              <a:t>▶ 0 错误消费校验 (PVT-06)：</a:t>
-            </a:r>
-            <a:r>
-              <a:rPr sz="1050" b="0">
+              <a:t>▶ 0 错误消费 (PVT-06)：</a:t>
+            </a:r>
+            <a:r>
+              <a:rPr sz="1100" b="0">
                 <a:solidFill>
                   <a:srgbClr val="475569"/>
                 </a:solidFill>
                 <a:latin typeface="Microsoft YaHei"/>
               </a:rPr>
-              <a:t>验证语义一致性资格校验与多卡状态同步，错误消费精确为 0。</a:t>
+              <a:t>6 维语义校验与多卡同步，0 错误消费。</a:t>
             </a:r>
           </a:p>
           <a:p>
             <a:pPr>
               <a:lnSpc>
-                <a:spcPct val="118000"/>
+                <a:spcPct val="122000"/>
               </a:lnSpc>
               <a:spcBef>
-                <a:spcPts val="400"/>
+                <a:spcPts val="600"/>
               </a:spcBef>
-              <a:defRPr sz="1100" b="1">
+              <a:defRPr sz="1150" b="1">
                 <a:solidFill>
                   <a:srgbClr val="0F172A"/>
                 </a:solidFill>
@@ -6246,13 +6273,13 @@
               <a:t>▶ E2 阶段目标：</a:t>
             </a:r>
             <a:r>
-              <a:rPr sz="1050" b="0">
+              <a:rPr sz="1100" b="0">
                 <a:solidFill>
                   <a:srgbClr val="475569"/>
                 </a:solidFill>
                 <a:latin typeface="Microsoft YaHei"/>
               </a:rPr>
-              <a:t>多介质分层扩容净收益成立，多租户隔离与消费安全 100% 达标。</a:t>
+              <a:t>分层扩容收益成立，多租户隔离达标。</a:t>
             </a:r>
           </a:p>
         </p:txBody>
@@ -6310,8 +6337,8 @@
         </p:nvSpPr>
         <p:spPr>
           <a:xfrm>
-            <a:off x="9107424" y="1645920"/>
-            <a:ext cx="2414016" cy="2944368"/>
+            <a:off x="9070848" y="1627632"/>
+            <a:ext cx="2487168" cy="2980944"/>
           </a:xfrm>
           <a:prstGeom prst="rect">
             <a:avLst/>
@@ -6326,9 +6353,9 @@
           <a:p>
             <a:pPr>
               <a:spcAft>
-                <a:spcPts val="200"/>
+                <a:spcPts val="400"/>
               </a:spcAft>
-              <a:defRPr sz="1150" b="1">
+              <a:defRPr sz="1200" b="1">
                 <a:solidFill>
                   <a:srgbClr val="047857"/>
                 </a:solidFill>
@@ -6342,12 +6369,12 @@
           <a:p>
             <a:pPr>
               <a:lnSpc>
-                <a:spcPct val="118000"/>
+                <a:spcPct val="122000"/>
               </a:lnSpc>
               <a:spcBef>
-                <a:spcPts val="400"/>
+                <a:spcPts val="600"/>
               </a:spcBef>
-              <a:defRPr sz="1100" b="1">
+              <a:defRPr sz="1150" b="1">
                 <a:solidFill>
                   <a:srgbClr val="0F172A"/>
                 </a:solidFill>
@@ -6358,24 +6385,24 @@
               <a:t>▶ 混压全链路门禁 (PVT-07)：</a:t>
             </a:r>
             <a:r>
-              <a:rPr sz="1050" b="0">
+              <a:rPr sz="1100" b="0">
                 <a:solidFill>
                   <a:srgbClr val="475569"/>
                 </a:solidFill>
                 <a:latin typeface="Microsoft YaHei"/>
               </a:rPr>
-              <a:t>前后台混压端到端最小闭环验证，保障前台 TPOT 干扰 &lt; 3%。</a:t>
+              <a:t>前后台混压全链路验证，TPOT 干扰 &lt; 3%。</a:t>
             </a:r>
           </a:p>
           <a:p>
             <a:pPr>
               <a:lnSpc>
-                <a:spcPct val="118000"/>
+                <a:spcPct val="122000"/>
               </a:lnSpc>
               <a:spcBef>
-                <a:spcPts val="400"/>
+                <a:spcPts val="600"/>
               </a:spcBef>
-              <a:defRPr sz="1100" b="1">
+              <a:defRPr sz="1150" b="1">
                 <a:solidFill>
                   <a:srgbClr val="0F172A"/>
                 </a:solidFill>
@@ -6383,27 +6410,27 @@
               </a:defRPr>
             </a:pPr>
             <a:r>
-              <a:t>▶ 3 项可行性证伪 (CVT)：</a:t>
-            </a:r>
-            <a:r>
-              <a:rPr sz="1050" b="0">
+              <a:t>▶ 3 项架构证伪 (CVT)：</a:t>
+            </a:r>
+            <a:r>
+              <a:rPr sz="1100" b="0">
                 <a:solidFill>
                   <a:srgbClr val="475569"/>
                 </a:solidFill>
                 <a:latin typeface="Microsoft YaHei"/>
               </a:rPr>
-              <a:t>CVT-01 多播、CVT-02 原子迁移、CVT-03 DPU 卸载证伪，确立纯软主路径。</a:t>
+              <a:t>多播/迁移/DPU 卸载证伪确立主路径。</a:t>
             </a:r>
           </a:p>
           <a:p>
             <a:pPr>
               <a:lnSpc>
-                <a:spcPct val="118000"/>
+                <a:spcPct val="122000"/>
               </a:lnSpc>
               <a:spcBef>
-                <a:spcPts val="400"/>
+                <a:spcPts val="600"/>
               </a:spcBef>
-              <a:defRPr sz="1100" b="1">
+              <a:defRPr sz="1150" b="1">
                 <a:solidFill>
                   <a:srgbClr val="0F172A"/>
                 </a:solidFill>
@@ -6414,13 +6441,13 @@
               <a:t>▶ E3 阶段目标：</a:t>
             </a:r>
             <a:r>
-              <a:rPr sz="1050" b="0">
+              <a:rPr sz="1100" b="0">
                 <a:solidFill>
                   <a:srgbClr val="475569"/>
                 </a:solidFill>
                 <a:latin typeface="Microsoft YaHei"/>
               </a:rPr>
-              <a:t>在真实混压下实现 P99 TTFT 降低 ≥20%、单位成本降低 ≥35%，释放后续研发投入。</a:t>
+              <a:t>真实混压下 TTFT 降 ≥20%、成本降 ≥35%。</a:t>
             </a:r>
           </a:p>
         </p:txBody>
@@ -6510,9 +6537,9 @@
                 <a:spcPct val="122000"/>
               </a:lnSpc>
               <a:spcBef>
-                <a:spcPts val="300"/>
+                <a:spcPts val="400"/>
               </a:spcBef>
-              <a:defRPr sz="1050">
+              <a:defRPr sz="1100">
                 <a:solidFill>
                   <a:srgbClr val="0F172A"/>
                 </a:solidFill>
@@ -6529,9 +6556,9 @@
                 <a:spcPct val="122000"/>
               </a:lnSpc>
               <a:spcBef>
-                <a:spcPts val="300"/>
+                <a:spcPts val="400"/>
               </a:spcBef>
-              <a:defRPr sz="1050">
+              <a:defRPr sz="1100">
                 <a:solidFill>
                   <a:srgbClr val="0F172A"/>
                 </a:solidFill>
@@ -6548,9 +6575,9 @@
                 <a:spcPct val="122000"/>
               </a:lnSpc>
               <a:spcBef>
-                <a:spcPts val="300"/>
+                <a:spcPts val="400"/>
               </a:spcBef>
-              <a:defRPr sz="1050">
+              <a:defRPr sz="1100">
                 <a:solidFill>
                   <a:srgbClr val="0F172A"/>
                 </a:solidFill>
@@ -6748,7 +6775,7 @@
                 </a:solidFill>
                 <a:latin typeface="Microsoft YaHei"/>
               </a:rPr>
-              <a:t>E0～E3 阶段判定标准</a:t>
+              <a:t>四个核心验证阶段 (E0～E3) 判定标准</a:t>
             </a:r>
             <a:r>
               <a:rPr sz="1150" b="0">
@@ -7038,7 +7065,7 @@
               </a:defRPr>
             </a:pPr>
             <a:r>
-              <a:t>共识一：原厂软硬件深度协同</a:t>
+              <a:t>共识一：基于 Mooncake 开源底盘深度重构</a:t>
             </a:r>
           </a:p>
           <a:p>
@@ -7076,7 +7103,7 @@
               </a:defRPr>
             </a:pPr>
             <a:r>
-              <a:t>立足国产芯片专属互联（HCCS / UBMEM / URMA），打通底层通信原语到模型状态管理的完整加速通路，充分释放硬件互联与多级存储潜能。</a:t>
+              <a:t>复用 Mooncake 现成生态接口与连接器，深度重构传输与调度内核，将 38 项核心需求转化为 5 大增强工程包，充分释放国产硬件互联与存储潜能。</a:t>
             </a:r>
           </a:p>
         </p:txBody>
@@ -7157,7 +7184,7 @@
               </a:defRPr>
             </a:pPr>
             <a:r>
-              <a:t>共识二：前置动态收益决策</a:t>
+              <a:t>共识二：前置动态收益决策与双流重叠</a:t>
             </a:r>
           </a:p>
           <a:p>
@@ -7276,7 +7303,7 @@
               </a:defRPr>
             </a:pPr>
             <a:r>
-              <a:t>共识三：生产级安全与多卡一致性</a:t>
+              <a:t>共识三：生产级 6 维校验与多卡原子保序</a:t>
             </a:r>
           </a:p>
           <a:p>
@@ -7314,7 +7341,7 @@
               </a:defRPr>
             </a:pPr>
             <a:r>
-              <a:t>引入严格的多维语义身份与显式租约机制，彻底消除半写、陈旧或失效缓存被错误读取；张量并行 (TP=8) 多卡原子保序，杜绝集合通信死等。</a:t>
+              <a:t>引入 6 维语义检查与显式租约守卫，彻底消除脏数据错误消费；张量并行 (TP=8) 多卡状态同步协同，杜绝集合通信死锁。</a:t>
             </a:r>
           </a:p>
         </p:txBody>
@@ -7395,7 +7422,7 @@
               </a:defRPr>
             </a:pPr>
             <a:r>
-              <a:t>共识四：阶段门禁与安全止损</a:t>
+              <a:t>共识四：阶段门禁与安全止损机制</a:t>
             </a:r>
           </a:p>
           <a:p>
@@ -7433,7 +7460,7 @@
               </a:defRPr>
             </a:pPr>
             <a:r>
-              <a:t>先以 4～5 周原型测试摸清技术边界，严格依据 E0～E3 阶段判定标准逐级推进研发投入；设立严密 No-Go 止损机制，若无显著增量则安全缩项。</a:t>
+              <a:t>先以 4～5 周原型测试摸清技术边界，严格依据四个核心验证阶段 (E0～E3) 判定标准逐级推进研发投入；设立严密 No-Go 止损机制，若无显著增量则安全缩项。</a:t>
             </a:r>
           </a:p>
         </p:txBody>
@@ -7659,7 +7686,7 @@
           <a:lstStyle/>
           <a:p>
             <a:pPr>
-              <a:defRPr sz="1900" b="1">
+              <a:defRPr sz="1800" b="1">
                 <a:solidFill>
                   <a:srgbClr val="1E3A8A"/>
                 </a:solidFill>
@@ -7667,7 +7694,7 @@
               </a:defRPr>
             </a:pPr>
             <a:r>
-              <a:t>我们为什么要做：打造面向国产 AI 硬件的统一异构 KVCache 存储与传输调度底座</a:t>
+              <a:t>我们为什么要做：打造面向国产 AI 硬件统一异构 KVCache 存储与调度底座</a:t>
             </a:r>
           </a:p>
           <a:p>
@@ -7683,7 +7710,7 @@
               </a:defRPr>
             </a:pPr>
             <a:r>
-              <a:t>从“框架内临时 Buffer”到“集群级高价值状态资产”——打通软硬件协同从底层通信原语到业务 SLO（服务等级目标）的闭环</a:t>
+              <a:t>从“通用开源传输底座”到“原厂软硬件协同状态系统”——打通底层通信原语到业务 SLO（服务等级目标）闭环</a:t>
             </a:r>
           </a:p>
         </p:txBody>
@@ -8031,7 +8058,7 @@
                 </a:solidFill>
                 <a:latin typeface="Microsoft YaHei"/>
               </a:rPr>
-              <a:t>长文本 (128K ~ 1M)、Agent 多轮与 PD 分离（计算与生成解耦）爆发，缓存复用成为提升吞吐核心指标。</a:t>
+              <a:t>长文本 (128K~1M)、Agent 多轮与 PD 分离（计算与生成解耦）爆发，缓存复用成为提升吞吐核心指标。</a:t>
             </a:r>
           </a:p>
           <a:p>
@@ -8168,7 +8195,7 @@
               </a:defRPr>
             </a:pPr>
             <a:r>
-              <a:t>3. 为什么自研 (Why In-house)</a:t>
+              <a:t>3. 为什么基于开源重构</a:t>
             </a:r>
           </a:p>
           <a:p>
@@ -8187,7 +8214,7 @@
               </a:defRPr>
             </a:pPr>
             <a:r>
-              <a:t>开源软件无法承载芯片深度优化</a:t>
+              <a:t>复用生态底盘 + 原厂硬核赋能</a:t>
             </a:r>
           </a:p>
           <a:p>
@@ -8206,7 +8233,7 @@
               </a:defRPr>
             </a:pPr>
             <a:r>
-              <a:t>• 专属微架构使能：</a:t>
+              <a:t>• 复用成熟生态外壳：</a:t>
             </a:r>
             <a:r>
               <a:rPr sz="1150" b="0">
@@ -8215,7 +8242,7 @@
                 </a:solidFill>
                 <a:latin typeface="Microsoft YaHei"/>
               </a:rPr>
-              <a:t>开源框架仅使用通用标准接口；自研系统可深入 UBMEM（总线共享内存）/ URMA（远程直接访问）等芯片底层原语。</a:t>
+              <a:t>复用 Mooncake 现成 C++ 构建体系、vLLM/SGLang 适配器与 C API，节省 30% 基础工程量。</a:t>
             </a:r>
           </a:p>
           <a:p>
@@ -8234,7 +8261,7 @@
               </a:defRPr>
             </a:pPr>
             <a:r>
-              <a:t>• 软硬件协同交付：</a:t>
+              <a:t>• 换心重构传输与调度：</a:t>
             </a:r>
             <a:r>
               <a:rPr sz="1150" b="0">
@@ -8243,7 +8270,7 @@
                 </a:solidFill>
                 <a:latin typeface="Microsoft YaHei"/>
               </a:rPr>
-              <a:t>开源社区不承担特定芯片的原厂交付、驱动协同适配与跨版本稳定性回归责任。</a:t>
+              <a:t>深入原厂 UBMEM（统一总线内存直通）与 URMA（通用远程直接内存访问）专属硬件通信原语。</a:t>
             </a:r>
           </a:p>
           <a:p>
@@ -8262,7 +8289,7 @@
               </a:defRPr>
             </a:pPr>
             <a:r>
-              <a:t>• SLA 与正确性保障：</a:t>
+              <a:t>• 原厂责任与质量闭环：</a:t>
             </a:r>
             <a:r>
               <a:rPr sz="1150" b="0">
@@ -8271,7 +8298,7 @@
                 </a:solidFill>
                 <a:latin typeface="Microsoft YaHei"/>
               </a:rPr>
-              <a:t>高并发 P99 尾延迟控制与 0 错误消费需由软硬件深度协同底座全面兜底。</a:t>
+              <a:t>开源社区不兜底特定硬件性能与稳定性；原厂软硬件协同系统全权保障高并发 P99 尾延迟与 0 错误消费。</a:t>
             </a:r>
           </a:p>
         </p:txBody>
@@ -8399,7 +8426,7 @@
                 </a:solidFill>
                 <a:latin typeface="Microsoft YaHei"/>
               </a:rPr>
-              <a:t>建立“业务特征 ➔ KV 语义 ➔ QueryPlan（查询计划）➔ UBMEM / URMA 直达”技术闭环。</a:t>
+              <a:t>建立“业务特征 ➔ KV 语义 ➔ QueryPlan（查询决策）➔ UBMEM/URMA 直达”技术闭环。</a:t>
             </a:r>
           </a:p>
           <a:p>
@@ -8455,7 +8482,7 @@
                 </a:solidFill>
                 <a:latin typeface="Microsoft YaHei"/>
               </a:rPr>
-              <a:t>通过多项关键技术原型实测数据，按 E0 ~ E3 阶段目标逐级推进研发投入。</a:t>
+              <a:t>通过 11 项原型实测数据，按四个核心验证阶段 (E0~E3) 门禁逐级推进研发投入。</a:t>
             </a:r>
           </a:p>
         </p:txBody>
@@ -8536,7 +8563,7 @@
               </a:defRPr>
             </a:pPr>
             <a:r>
-              <a:t>【软硬件协同状态管理价值转化闭环链路图】</a:t>
+              <a:t>【软硬件协同状态管理价值转化闭环链路图（开源底座 + 原厂硬核赋能）】</a:t>
             </a:r>
           </a:p>
         </p:txBody>
@@ -8730,7 +8757,7 @@
               </a:defRPr>
             </a:pPr>
             <a:r>
-              <a:t>2. KV 语义治理</a:t>
+              <a:t>2. 开源底座接入</a:t>
             </a:r>
           </a:p>
           <a:p>
@@ -8746,7 +8773,7 @@
               </a:defRPr>
             </a:pPr>
             <a:r>
-              <a:t>Layer / TP Rank 身份</a:t>
+              <a:t>Mooncake 通用 Connector</a:t>
             </a:r>
           </a:p>
           <a:p>
@@ -8762,7 +8789,7 @@
               </a:defRPr>
             </a:pPr>
             <a:r>
-              <a:t>严格权限与租约校验</a:t>
+              <a:t>兼容 vLLM/SGLang 接口</a:t>
             </a:r>
           </a:p>
         </p:txBody>
@@ -8843,7 +8870,7 @@
               </a:defRPr>
             </a:pPr>
             <a:r>
-              <a:t>3. 动态选路决策</a:t>
+              <a:t>3. 原厂增强内核</a:t>
             </a:r>
           </a:p>
           <a:p>
@@ -8859,7 +8886,7 @@
               </a:defRPr>
             </a:pPr>
             <a:r>
-              <a:t>QueryPlan 微秒决策</a:t>
+              <a:t>语义编译 + UBMEM 底座</a:t>
             </a:r>
           </a:p>
           <a:p>
@@ -8875,7 +8902,7 @@
               </a:defRPr>
             </a:pPr>
             <a:r>
-              <a:t>正收益判定保障 SLO</a:t>
+              <a:t>6 维校验与微秒决策</a:t>
             </a:r>
           </a:p>
         </p:txBody>
@@ -8956,7 +8983,7 @@
               </a:defRPr>
             </a:pPr>
             <a:r>
-              <a:t>4. 硬件极速搬运</a:t>
+              <a:t>4. 硬件直达执行</a:t>
             </a:r>
           </a:p>
           <a:p>
@@ -8972,7 +8999,7 @@
               </a:defRPr>
             </a:pPr>
             <a:r>
-              <a:t>URMA / PCIe 直达</a:t>
+              <a:t>URMA / Direct PCIe DMA</a:t>
             </a:r>
           </a:p>
           <a:p>
@@ -9246,7 +9273,7 @@
                 </a:solidFill>
                 <a:latin typeface="Microsoft YaHei"/>
               </a:rPr>
-              <a:t>针对开源软件无法深度调用国产芯片特性的短板，自研统一异构 KVCache 存储池，通过 UBMEM / URMA 底层原语打通数据流，实现 </a:t>
+              <a:t>将项目定位调整为基于 Mooncake 深度重构与架构增强，借力开源生态外壳，全面注入原厂 UBMEM / URMA 底座与语义智能，实现 </a:t>
             </a:r>
             <a:r>
               <a:rPr sz="1150" b="1">
@@ -9273,7 +9300,7 @@
                 </a:solidFill>
                 <a:latin typeface="Microsoft YaHei"/>
               </a:rPr>
-              <a:t>HBM（高带宽显存）有效容量提升 ≥30%</a:t>
+              <a:t>显存有效容量提升 ≥30%</a:t>
             </a:r>
             <a:r>
               <a:rPr sz="1150" b="0">
@@ -9291,7 +9318,7 @@
                 </a:solidFill>
                 <a:latin typeface="Microsoft YaHei"/>
               </a:rPr>
-              <a:t>错误消费率为 0</a:t>
+              <a:t>错误消费事故率为 0</a:t>
             </a:r>
             <a:r>
               <a:rPr sz="1150" b="0">
@@ -9354,7 +9381,7 @@
           <a:lstStyle/>
           <a:p>
             <a:pPr>
-              <a:defRPr sz="1900" b="1">
+              <a:defRPr sz="1800" b="1">
                 <a:solidFill>
                   <a:srgbClr val="1E3A8A"/>
                 </a:solidFill>
@@ -9463,7 +9490,7 @@
                       </a:r>
                     </a:p>
                   </a:txBody>
-                  <a:tcPr>
+                  <a:tcPr anchor="ctr">
                     <a:solidFill>
                       <a:srgbClr val="1E3A8A"/>
                     </a:solidFill>
@@ -9487,7 +9514,7 @@
                       </a:r>
                     </a:p>
                   </a:txBody>
-                  <a:tcPr>
+                  <a:tcPr anchor="ctr">
                     <a:solidFill>
                       <a:srgbClr val="1E3A8A"/>
                     </a:solidFill>
@@ -9511,7 +9538,7 @@
                       </a:r>
                     </a:p>
                   </a:txBody>
-                  <a:tcPr>
+                  <a:tcPr anchor="ctr">
                     <a:solidFill>
                       <a:srgbClr val="1E3A8A"/>
                     </a:solidFill>
@@ -9535,7 +9562,7 @@
                       </a:r>
                     </a:p>
                   </a:txBody>
-                  <a:tcPr>
+                  <a:tcPr anchor="ctr">
                     <a:solidFill>
                       <a:srgbClr val="1E3A8A"/>
                     </a:solidFill>
@@ -9559,7 +9586,7 @@
                       </a:r>
                     </a:p>
                   </a:txBody>
-                  <a:tcPr>
+                  <a:tcPr anchor="ctr">
                     <a:solidFill>
                       <a:srgbClr val="1E3A8A"/>
                     </a:solidFill>
@@ -9592,7 +9619,7 @@
                       </a:r>
                     </a:p>
                   </a:txBody>
-                  <a:tcPr>
+                  <a:tcPr anchor="ctr">
                     <a:solidFill>
                       <a:srgbClr val="FFFFFF"/>
                     </a:solidFill>
@@ -9623,7 +9650,7 @@
                       </a:r>
                     </a:p>
                   </a:txBody>
-                  <a:tcPr>
+                  <a:tcPr anchor="ctr">
                     <a:solidFill>
                       <a:srgbClr val="FFFFFF"/>
                     </a:solidFill>
@@ -9658,7 +9685,7 @@
                       </a:r>
                     </a:p>
                   </a:txBody>
-                  <a:tcPr>
+                  <a:tcPr anchor="ctr">
                     <a:solidFill>
                       <a:srgbClr val="FFFFFF"/>
                     </a:solidFill>
@@ -9693,7 +9720,7 @@
                       </a:r>
                     </a:p>
                   </a:txBody>
-                  <a:tcPr>
+                  <a:tcPr anchor="ctr">
                     <a:solidFill>
                       <a:srgbClr val="FFFFFF"/>
                     </a:solidFill>
@@ -9728,7 +9755,7 @@
                       </a:r>
                     </a:p>
                   </a:txBody>
-                  <a:tcPr>
+                  <a:tcPr anchor="ctr">
                     <a:solidFill>
                       <a:srgbClr val="FFFFFF"/>
                     </a:solidFill>
@@ -9761,7 +9788,7 @@
                       </a:r>
                     </a:p>
                   </a:txBody>
-                  <a:tcPr>
+                  <a:tcPr anchor="ctr">
                     <a:solidFill>
                       <a:srgbClr val="F1F5F9"/>
                     </a:solidFill>
@@ -9796,7 +9823,7 @@
                       </a:r>
                     </a:p>
                   </a:txBody>
-                  <a:tcPr>
+                  <a:tcPr anchor="ctr">
                     <a:solidFill>
                       <a:srgbClr val="F1F5F9"/>
                     </a:solidFill>
@@ -9831,7 +9858,7 @@
                       </a:r>
                     </a:p>
                   </a:txBody>
-                  <a:tcPr>
+                  <a:tcPr anchor="ctr">
                     <a:solidFill>
                       <a:srgbClr val="F1F5F9"/>
                     </a:solidFill>
@@ -9866,7 +9893,7 @@
                       </a:r>
                     </a:p>
                   </a:txBody>
-                  <a:tcPr>
+                  <a:tcPr anchor="ctr">
                     <a:solidFill>
                       <a:srgbClr val="F1F5F9"/>
                     </a:solidFill>
@@ -9901,7 +9928,7 @@
                       </a:r>
                     </a:p>
                   </a:txBody>
-                  <a:tcPr>
+                  <a:tcPr anchor="ctr">
                     <a:solidFill>
                       <a:srgbClr val="F1F5F9"/>
                     </a:solidFill>
@@ -9934,7 +9961,7 @@
                       </a:r>
                     </a:p>
                   </a:txBody>
-                  <a:tcPr>
+                  <a:tcPr anchor="ctr">
                     <a:solidFill>
                       <a:srgbClr val="FFFFFF"/>
                     </a:solidFill>
@@ -9969,7 +9996,7 @@
                       </a:r>
                     </a:p>
                   </a:txBody>
-                  <a:tcPr>
+                  <a:tcPr anchor="ctr">
                     <a:solidFill>
                       <a:srgbClr val="FFFFFF"/>
                     </a:solidFill>
@@ -10004,7 +10031,7 @@
                       </a:r>
                     </a:p>
                   </a:txBody>
-                  <a:tcPr>
+                  <a:tcPr anchor="ctr">
                     <a:solidFill>
                       <a:srgbClr val="FFFFFF"/>
                     </a:solidFill>
@@ -10039,7 +10066,7 @@
                       </a:r>
                     </a:p>
                   </a:txBody>
-                  <a:tcPr>
+                  <a:tcPr anchor="ctr">
                     <a:solidFill>
                       <a:srgbClr val="FFFFFF"/>
                     </a:solidFill>
@@ -10074,7 +10101,7 @@
                       </a:r>
                     </a:p>
                   </a:txBody>
-                  <a:tcPr>
+                  <a:tcPr anchor="ctr">
                     <a:solidFill>
                       <a:srgbClr val="FFFFFF"/>
                     </a:solidFill>
@@ -10107,7 +10134,7 @@
                       </a:r>
                     </a:p>
                   </a:txBody>
-                  <a:tcPr>
+                  <a:tcPr anchor="ctr">
                     <a:solidFill>
                       <a:srgbClr val="F1F5F9"/>
                     </a:solidFill>
@@ -10142,7 +10169,7 @@
                       </a:r>
                     </a:p>
                   </a:txBody>
-                  <a:tcPr>
+                  <a:tcPr anchor="ctr">
                     <a:solidFill>
                       <a:srgbClr val="F1F5F9"/>
                     </a:solidFill>
@@ -10177,7 +10204,7 @@
                       </a:r>
                     </a:p>
                   </a:txBody>
-                  <a:tcPr>
+                  <a:tcPr anchor="ctr">
                     <a:solidFill>
                       <a:srgbClr val="F1F5F9"/>
                     </a:solidFill>
@@ -10212,7 +10239,7 @@
                       </a:r>
                     </a:p>
                   </a:txBody>
-                  <a:tcPr>
+                  <a:tcPr anchor="ctr">
                     <a:solidFill>
                       <a:srgbClr val="F1F5F9"/>
                     </a:solidFill>
@@ -10247,7 +10274,7 @@
                       </a:r>
                     </a:p>
                   </a:txBody>
-                  <a:tcPr>
+                  <a:tcPr anchor="ctr">
                     <a:solidFill>
                       <a:srgbClr val="F1F5F9"/>
                     </a:solidFill>
@@ -10534,7 +10561,7 @@
               </a:defRPr>
             </a:pPr>
             <a:r>
-              <a:t>趋势三：原厂软硬件协同成为系统竞争关键</a:t>
+              <a:t>趋势三：开源底座 + 原厂专用定制成为共识</a:t>
             </a:r>
           </a:p>
           <a:p>
@@ -10553,7 +10580,7 @@
               </a:defRPr>
             </a:pPr>
             <a:r>
-              <a:t>巨头全栈闭环演进表明：国产芯片必须建立原厂软硬件协同底座，将底层硬件潜力转化为真实业务收益。</a:t>
+              <a:t>巨头演进表明：开源提供通用协议抽象，芯片厂商主打原厂专用硬件加速与直达通路。</a:t>
             </a:r>
           </a:p>
         </p:txBody>
@@ -10716,7 +10743,7 @@
                 </a:solidFill>
                 <a:latin typeface="Microsoft YaHei"/>
               </a:rPr>
-              <a:t>。国产芯片必须打造 </a:t>
+              <a:t>。通用开源方案仅提供基础抽象，国产芯片必须打造 </a:t>
             </a:r>
             <a:r>
               <a:rPr sz="1150" b="1">
@@ -10725,7 +10752,7 @@
                 </a:solidFill>
                 <a:latin typeface="Microsoft YaHei"/>
               </a:rPr>
-              <a:t>原厂软硬件协同底座</a:t>
+              <a:t>原厂深度重构与软硬件协同底座</a:t>
             </a:r>
             <a:r>
               <a:rPr sz="1150" b="0">
@@ -10734,7 +10761,7 @@
                 </a:solidFill>
                 <a:latin typeface="Microsoft YaHei"/>
               </a:rPr>
-              <a:t>，深度挖掘硬件互联与存储潜力，才能将底层微架构优势转化为端到端业务收益。</a:t>
+              <a:t>，才能将底层微架构优势转化为端到端业务收益。</a:t>
             </a:r>
           </a:p>
         </p:txBody>
@@ -10788,7 +10815,7 @@
           <a:lstStyle/>
           <a:p>
             <a:pPr>
-              <a:defRPr sz="1900" b="1">
+              <a:defRPr sz="1800" b="1">
                 <a:solidFill>
                   <a:srgbClr val="1E3A8A"/>
                 </a:solidFill>
@@ -11141,7 +11168,7 @@
               </a:defRPr>
             </a:pPr>
             <a:r>
-              <a:t>客观工程局限：无语义抽象带来的 4 大结构性代价</a:t>
+              <a:t>客观工程局限：无语义切片打散带来的 4 大结构性代价</a:t>
             </a:r>
           </a:p>
           <a:p>
@@ -11207,7 +11234,7 @@
               </a:defRPr>
             </a:pPr>
             <a:r>
-              <a:t>✘ 无语义导致无法感知层级依赖：</a:t>
+              <a:t>✘ 无语义破坏层序致 Layer 0 卡死：</a:t>
             </a:r>
             <a:r>
               <a:rPr sz="1150" b="0">
@@ -11244,7 +11271,7 @@
                 </a:solidFill>
                 <a:latin typeface="Microsoft YaHei"/>
               </a:rPr>
-              <a:t>同一层 KV 散落各节点，拉取总耗时取决于最慢节点（木桶短板效应）。</a:t>
+              <a:t>同一层 KV 散落各节点，拉取总耗时取决于最慢节点（单层木桶短板效应）。</a:t>
             </a:r>
           </a:p>
           <a:p>
@@ -11263,7 +11290,7 @@
               </a:defRPr>
             </a:pPr>
             <a:r>
-              <a:t>✘ 开源定位无法承载企业级高可用：</a:t>
+              <a:t>✘ Full Mesh 流量引发 Incast 塌陷：</a:t>
             </a:r>
             <a:r>
               <a:rPr sz="1150" b="0">
@@ -11272,7 +11299,7 @@
                 </a:solidFill>
                 <a:latin typeface="Microsoft YaHei"/>
               </a:rPr>
-              <a:t>开源主干对多租户配额、高可用 HA（高可用性）仅保留 Stub 空桩，无法兜底生产 SLA。</a:t>
+              <a:t>全网无序并发打散发送引发交换机出端口 Buffer 耗尽，导致丢包重传与 RoCEv2 PFC 死锁。</a:t>
             </a:r>
           </a:p>
         </p:txBody>
@@ -11698,7 +11725,7 @@
                 </a:solidFill>
                 <a:latin typeface="Microsoft YaHei"/>
               </a:rPr>
-              <a:t>Mooncake 聚焦通用跨节点数据传输与写带宽打满，但缺乏模型层级语义感知，导致前台读（Load）面临严重的 </a:t>
+              <a:t>Mooncake 聚焦通用跨节点传输与写带宽打满，但其 64KB Spraying 模式导致前台读面临严重的 </a:t>
             </a:r>
             <a:r>
               <a:rPr sz="1150" b="1">
@@ -11707,7 +11734,7 @@
                 </a:solidFill>
                 <a:latin typeface="Microsoft YaHei"/>
               </a:rPr>
-              <a:t>Incast 网络拥塞与尾延迟抖动</a:t>
+              <a:t>Layer 0 卡死、单层木桶短板与 Incast 拥塞</a:t>
             </a:r>
             <a:r>
               <a:rPr sz="1150" b="0">
@@ -11716,7 +11743,7 @@
                 </a:solidFill>
                 <a:latin typeface="Microsoft YaHei"/>
               </a:rPr>
-              <a:t>；本项目通过引入 </a:t>
+              <a:t>；本项目以此为关键切入点，通过 </a:t>
             </a:r>
             <a:r>
               <a:rPr sz="1150" b="1">
@@ -11725,7 +11752,7 @@
                 </a:solidFill>
                 <a:latin typeface="Microsoft YaHei"/>
               </a:rPr>
-              <a:t>LLM 语义感知与芯片底层直达传输</a:t>
+              <a:t>重构传输层为连续块描述符编译与层序感知流水</a:t>
             </a:r>
             <a:r>
               <a:rPr sz="1150" b="0">
@@ -11734,7 +11761,7 @@
                 </a:solidFill>
                 <a:latin typeface="Microsoft YaHei"/>
               </a:rPr>
-              <a:t>，在保障吞吐的同时重点消除前台读的长尾延迟。</a:t>
+              <a:t>，全面攻克开源底座的核心缺陷。</a:t>
             </a:r>
           </a:p>
         </p:txBody>
@@ -11788,7 +11815,7 @@
           <a:lstStyle/>
           <a:p>
             <a:pPr>
-              <a:defRPr sz="1900" b="1">
+              <a:defRPr sz="1800" b="1">
                 <a:solidFill>
                   <a:srgbClr val="1E3A8A"/>
                 </a:solidFill>
@@ -11796,7 +11823,7 @@
               </a:defRPr>
             </a:pPr>
             <a:r>
-              <a:t>开源软件不足剖析 (2/2)：代码级预埋点、社区真实反馈与开源方案落地局限</a:t>
+              <a:t>开源软件不足剖析 (2/2)：代码级行级证据与原厂深度重构的必要性</a:t>
             </a:r>
           </a:p>
           <a:p>
@@ -11812,7 +11839,7 @@
               </a:defRPr>
             </a:pPr>
             <a:r>
-              <a:t>源码行级证据穿透“单流 P50 局限”，揭示生产集群网络争抢与开源方案的实际落地边界</a:t>
+              <a:t>源码行级证据穿透“单流 P50 局限”，揭示生产集群网络争抢与必须进行 5 大增强重构的根因</a:t>
             </a:r>
           </a:p>
         </p:txBody>
@@ -11929,7 +11956,7 @@
               </a:defRPr>
             </a:pPr>
             <a:r>
-              <a:t>1. 物理机理与社区反馈：Incast 拥塞与尾延迟尖峰</a:t>
+              <a:t>1. 传输与网络机理：Incast 拥塞与尾延迟尖峰</a:t>
             </a:r>
           </a:p>
           <a:p>
@@ -11948,7 +11975,7 @@
               </a:defRPr>
             </a:pPr>
             <a:r>
-              <a:t>[网络物理机理与 vLLM 社区反馈证据]</a:t>
+              <a:t>[网络物理机理与 vLLM 社区真实长尾反馈]</a:t>
             </a:r>
           </a:p>
           <a:p>
@@ -12113,7 +12140,7 @@
               </a:defRPr>
             </a:pPr>
             <a:r>
-              <a:t>2. 代码架构与层级缺失：types.h 无模型层级定义</a:t>
+              <a:t>2. 语义感知缺失：types.h 零 layer_id 定义</a:t>
             </a:r>
           </a:p>
           <a:p>
@@ -12297,7 +12324,7 @@
               </a:defRPr>
             </a:pPr>
             <a:r>
-              <a:t>3. 调度策略与被动补救：RFC #2519 出队 Drop</a:t>
+              <a:t>3. 硬件与调度局限：通用 RDMA 缺硬件直达与动态 ROI</a:t>
             </a:r>
           </a:p>
           <a:p>
@@ -12316,7 +12343,7 @@
               </a:defRPr>
             </a:pPr>
             <a:r>
-              <a:t>[源码分析：排队拥塞后的被动补丁与资源开销]</a:t>
+              <a:t>[源码分析：缺 UBMEM/URMA 原生底座与微秒级选路]</a:t>
             </a:r>
           </a:p>
           <a:p>
@@ -12335,7 +12362,7 @@
               </a:defRPr>
             </a:pPr>
             <a:r>
-              <a:t>• 源码 admission_queue：</a:t>
+              <a:t>• 缺 UBMEM/URMA 底座：</a:t>
             </a:r>
             <a:r>
               <a:rPr sz="1150" b="0">
@@ -12344,7 +12371,7 @@
                 </a:solidFill>
                 <a:latin typeface="Microsoft YaHei"/>
               </a:rPr>
-              <a:t>RFC #2519 在 pickForDispatch 出队末端检测超时并被动丢弃。</a:t>
+              <a:t>原生仅支持通用 RDMA/TCP，数据经 Host DDR 中转，无法实现 HBM-SSD 直达。</a:t>
             </a:r>
           </a:p>
           <a:p>
@@ -12363,7 +12390,7 @@
               </a:defRPr>
             </a:pPr>
             <a:r>
-              <a:t>• multi_rail 令牌桶：</a:t>
+              <a:t>• 缺微秒动态 ROI 决策：</a:t>
             </a:r>
             <a:r>
               <a:rPr sz="1150" b="0">
@@ -12372,7 +12399,7 @@
                 </a:solidFill>
                 <a:latin typeface="Microsoft YaHei"/>
               </a:rPr>
-              <a:t>为缓解切片到达倾斜 (Skew) 与 Incast，源码预埋软件令牌桶限速机制。</a:t>
+              <a:t>静态贪婪拉取，在短前缀或网络拥塞时，网络拉取耗时远超本地重算致 TTFT 反噬。</a:t>
             </a:r>
           </a:p>
           <a:p>
@@ -12391,7 +12418,7 @@
               </a:defRPr>
             </a:pPr>
             <a:r>
-              <a:t>• 开销损耗与算力等待：</a:t>
+              <a:t>• 被动补救损耗算力：</a:t>
             </a:r>
             <a:r>
               <a:rPr sz="1150" b="0">
@@ -12400,7 +12427,7 @@
                 </a:solidFill>
                 <a:latin typeface="Microsoft YaHei"/>
               </a:rPr>
-              <a:t>出队末端被动丢弃时，前期已消耗的锁与内存注册开销全部浪费，算力已空等。</a:t>
+              <a:t>admission_queue RFC #2519 在出队末端超时丢弃，前期锁与注册开销完全浪费。</a:t>
             </a:r>
           </a:p>
         </p:txBody>
@@ -12481,7 +12508,7 @@
               </a:defRPr>
             </a:pPr>
             <a:r>
-              <a:t>4. 演进策略与代码留白：企业级功能开源维护局限</a:t>
+              <a:t>4. 安全与协同短板：缺失 6 维语义校验与多卡同步</a:t>
             </a:r>
           </a:p>
           <a:p>
@@ -12500,7 +12527,7 @@
               </a:defRPr>
             </a:pPr>
             <a:r>
-              <a:t>[开源供应链考量与原厂自研底座必要性]</a:t>
+              <a:t>[源码分析：多租户脏数据风险与集合通信死锁隐患]</a:t>
             </a:r>
           </a:p>
           <a:p>
@@ -12519,7 +12546,7 @@
               </a:defRPr>
             </a:pPr>
             <a:r>
-              <a:t>• 演进策略分化：</a:t>
+              <a:t>• 缺 6 维语义校验与租约：</a:t>
             </a:r>
             <a:r>
               <a:rPr sz="1150" b="0">
@@ -12528,7 +12555,7 @@
                 </a:solidFill>
                 <a:latin typeface="Microsoft YaHei"/>
               </a:rPr>
-              <a:t>开源项目通常侧重基础通用能力，企业级深度优化往往走向差异化闭环。</a:t>
+              <a:t>无模型/词表/模板/租约检查，多租户或热更新时极易读取过期脏数据致生成错乱。</a:t>
             </a:r>
           </a:p>
           <a:p>
@@ -12547,7 +12574,7 @@
               </a:defRPr>
             </a:pPr>
             <a:r>
-              <a:t>• 核心 HA 模块留白：</a:t>
+              <a:t>• 缺 TP=8 多卡状态同步：</a:t>
             </a:r>
             <a:r>
               <a:rPr sz="1150" b="0">
@@ -12556,7 +12583,7 @@
                 </a:solidFill>
                 <a:latin typeface="Microsoft YaHei"/>
               </a:rPr>
-              <a:t>mooncake-store 大规模 HA（高可用）与多租户配额在主干中多保留为 Stub 空桩。</a:t>
+              <a:t>各卡独立拉取，单卡未命中极易诱发 NCCL/HCCL 集合通信死锁挂起。</a:t>
             </a:r>
           </a:p>
           <a:p>
@@ -12575,7 +12602,7 @@
               </a:defRPr>
             </a:pPr>
             <a:r>
-              <a:t>• 原厂深度适配必然性：</a:t>
+              <a:t>• 企业级 HA 模块留白：</a:t>
             </a:r>
             <a:r>
               <a:rPr sz="1150" b="0">
@@ -12584,7 +12611,7 @@
                 </a:solidFill>
                 <a:latin typeface="Microsoft YaHei"/>
               </a:rPr>
-              <a:t>通用开源无法保证对特定国产 NPU 微架构与驱动版本的持续深度优化与 SLA 兜底。</a:t>
+              <a:t>mooncake-store 大规模 HA 与多租户配额在开源主干中多保留为 Stub 空桩。</a:t>
             </a:r>
           </a:p>
         </p:txBody>
@@ -12720,7 +12747,7 @@
                 </a:solidFill>
                 <a:latin typeface="Microsoft YaHei"/>
               </a:rPr>
-              <a:t>开源落地局限：</a:t>
+              <a:t>重构增强必然性：</a:t>
             </a:r>
             <a:r>
               <a:rPr sz="1150" b="0">
@@ -12729,7 +12756,7 @@
                 </a:solidFill>
                 <a:latin typeface="Microsoft YaHei"/>
               </a:rPr>
-              <a:t>源码分析与社区实测表明，通用开源方案的无语义切片和被动丢弃机制 </a:t>
+              <a:t>源码分析与社区实测表明，通用开源方案存在 5 大结构性缺陷；本项目将原有需求 100% 转化为针对 Mooncake 的 </a:t>
             </a:r>
             <a:r>
               <a:rPr sz="1150" b="1">
@@ -12738,7 +12765,7 @@
                 </a:solidFill>
                 <a:latin typeface="Microsoft YaHei"/>
               </a:rPr>
-              <a:t>无法根除网络 Incast 拥塞与尾延迟劣化</a:t>
+              <a:t>5 大关键技术增强工程包（连续块描述符、UBMEM/URMA底座、动态ROI、6维校验、多卡同步）</a:t>
             </a:r>
             <a:r>
               <a:rPr sz="1150" b="0">
@@ -12747,25 +12774,7 @@
                 </a:solidFill>
                 <a:latin typeface="Microsoft YaHei"/>
               </a:rPr>
-              <a:t>；必须通过自研系统将 </a:t>
-            </a:r>
-            <a:r>
-              <a:rPr sz="1150" b="1">
-                <a:solidFill>
-                  <a:srgbClr val="DC2626"/>
-                </a:solidFill>
-                <a:latin typeface="Microsoft YaHei"/>
-              </a:rPr>
-              <a:t>模型计算时序、网络 QoS（服务质量）与芯片通信原语深度结合</a:t>
-            </a:r>
-            <a:r>
-              <a:rPr sz="1150" b="0">
-                <a:solidFill>
-                  <a:srgbClr val="0F172A"/>
-                </a:solidFill>
-                <a:latin typeface="Microsoft YaHei"/>
-              </a:rPr>
-              <a:t>，才能满足严苛生产 SLA（服务等级协议）要求。</a:t>
+              <a:t>，完成从通用组件到原厂高性能底座的彻底升维。</a:t>
             </a:r>
           </a:p>
         </p:txBody>
@@ -12819,7 +12828,7 @@
           <a:lstStyle/>
           <a:p>
             <a:pPr>
-              <a:defRPr sz="1900" b="1">
+              <a:defRPr sz="1800" b="1">
                 <a:solidFill>
                   <a:srgbClr val="1E3A8A"/>
                 </a:solidFill>
@@ -12827,7 +12836,7 @@
               </a:defRPr>
             </a:pPr>
             <a:r>
-              <a:t>针对开源不足的方案优势 (1/2)：从通用传输组件到语义化统一异构内存池</a:t>
+              <a:t>针对开源不足的方案优势 (1/2)：基于 Mooncake 底座注入原厂 5 大关键技术增强包</a:t>
             </a:r>
           </a:p>
           <a:p>
@@ -12960,7 +12969,7 @@
               </a:defRPr>
             </a:pPr>
             <a:r>
-              <a:t>支柱一：拓扑亲和映射</a:t>
+              <a:t>增强一：连续块描述符编译</a:t>
             </a:r>
           </a:p>
           <a:p>
@@ -12998,7 +13007,7 @@
               </a:defRPr>
             </a:pPr>
             <a:r>
-              <a:t>• 语义与拓扑绑定：</a:t>
+              <a:t>• Extent 连续块描述符：</a:t>
             </a:r>
             <a:r>
               <a:rPr sz="1150" b="0">
@@ -13007,7 +13016,7 @@
                 </a:solidFill>
                 <a:latin typeface="Microsoft YaHei"/>
               </a:rPr>
-              <a:t>通过 KVSemanticIdentity 绑定 Model / Layer / TP Rank（张量并行卡号）。</a:t>
+              <a:t>用 64B POD 描述符贪心合并离散 Block，Layer 0 优先传输消除流水等待。</a:t>
             </a:r>
           </a:p>
           <a:p>
@@ -13035,7 +13044,7 @@
                 </a:solidFill>
                 <a:latin typeface="Microsoft YaHei"/>
               </a:rPr>
-              <a:t>片间走 HCCS 环路，机架内走 URMA 直连，存储走 PCIe DMA（直接内存访问）。</a:t>
+              <a:t>片间走 HCCS 环路，机架内走 URMA 直连，存储走 PCIe DMA。</a:t>
             </a:r>
           </a:p>
           <a:p>
@@ -13063,7 +13072,7 @@
                 </a:solidFill>
                 <a:latin typeface="Microsoft YaHei"/>
               </a:rPr>
-              <a:t>同 Prompt / Layer 局域汇聚，从源头消除 N-to-1 Incast 拥塞。</a:t>
+              <a:t>同 Prompt / Layer 局域汇聚，描述符压缩率 ≥50%，彻底消除 Incast 拥塞。</a:t>
             </a:r>
           </a:p>
         </p:txBody>
@@ -13144,7 +13153,7 @@
               </a:defRPr>
             </a:pPr>
             <a:r>
-              <a:t>支柱二：Host 零数据拷贝</a:t>
+              <a:t>增强二：Host CPU 零数据拷贝</a:t>
             </a:r>
           </a:p>
           <a:p>
@@ -13191,7 +13200,7 @@
                 </a:solidFill>
                 <a:latin typeface="Microsoft YaHei"/>
               </a:rPr>
-              <a:t>控制面仅下发指令，正文数据 100% 绕过 Host CPU 与内存，消除内存拷贝开销。</a:t>
+              <a:t>CPU 仅负责下发控制指令，正文数据 100% 硬件直达，Host Payload 严格为 0。</a:t>
             </a:r>
           </a:p>
           <a:p>
@@ -13219,7 +13228,7 @@
                 </a:solidFill>
                 <a:latin typeface="Microsoft YaHei"/>
               </a:rPr>
-              <a:t>通过 Direct PCIe DMA 实现 NPU HBM（显存）与 SSD 线速搬运。</a:t>
+              <a:t>通过 Direct PCIe DMA 实现 NPU HBM 与 NVMe SSD 线速直达。</a:t>
             </a:r>
           </a:p>
           <a:p>
@@ -13328,7 +13337,7 @@
               </a:defRPr>
             </a:pPr>
             <a:r>
-              <a:t>支柱三：UBMEM 总线直通</a:t>
+              <a:t>增强三：UBMEM 总线直通</a:t>
             </a:r>
           </a:p>
           <a:p>
@@ -13347,7 +13356,7 @@
               </a:defRPr>
             </a:pPr>
             <a:r>
-              <a:t>控制面元数据时延 &lt; 5 µs</a:t>
+              <a:t>控制面元数据时延微秒级响应</a:t>
             </a:r>
           </a:p>
           <a:p>
@@ -13422,7 +13431,7 @@
               </a:defRPr>
             </a:pPr>
             <a:r>
-              <a:t>• 时延压降 20 倍：</a:t>
+              <a:t>• 控制面时延显著降低：</a:t>
             </a:r>
             <a:r>
               <a:rPr sz="1150" b="0">
@@ -13431,7 +13440,7 @@
                 </a:solidFill>
                 <a:latin typeface="Microsoft YaHei"/>
               </a:rPr>
-              <a:t>控制面时延从 50 ~ 100 µs 压降至 &lt; 5 µs，为数据传输争取宝贵时延预算。</a:t>
+              <a:t>控制面时延从 50 ~ 100 µs 降至微秒级至数十微秒，为数据传输争取宝贵时延预算。</a:t>
             </a:r>
           </a:p>
         </p:txBody>
@@ -13512,7 +13521,7 @@
               </a:defRPr>
             </a:pPr>
             <a:r>
-              <a:t>支柱四：多介质统一分层</a:t>
+              <a:t>增强四：多介质统一分层</a:t>
             </a:r>
           </a:p>
           <a:p>
@@ -13559,7 +13568,7 @@
                 </a:solidFill>
                 <a:latin typeface="Microsoft YaHei"/>
               </a:rPr>
-              <a:t>将 HBM ↔ SSD 直达确立为主要扩展路径，DDR（内存）退居辅助缓冲。</a:t>
+              <a:t>将 HBM ↔ SSD 直达确立为主要扩展路径，DDR 退居辅助缓冲。</a:t>
             </a:r>
           </a:p>
           <a:p>
@@ -13696,7 +13705,7 @@
               </a:defRPr>
             </a:pPr>
             <a:r>
-              <a:t>【统一异构 KVCache 存储池全栈分层协作拓扑】</a:t>
+              <a:t>【统一异构 KVCache 存储池全栈分层协作拓扑 (Mooncake 底座 + 原厂 5 大增强包)】</a:t>
             </a:r>
           </a:p>
         </p:txBody>
@@ -13777,7 +13786,7 @@
               </a:defRPr>
             </a:pPr>
             <a:r>
-              <a:t>L1. 框架意图接入层</a:t>
+              <a:t>L1. 开源意图接入层</a:t>
             </a:r>
           </a:p>
           <a:p>
@@ -13793,7 +13802,7 @@
               </a:defRPr>
             </a:pPr>
             <a:r>
-              <a:t>vLLM / SGLang 统一接口</a:t>
+              <a:t>Mooncake Connector 统一适配</a:t>
             </a:r>
           </a:p>
           <a:p>
@@ -13809,7 +13818,7 @@
               </a:defRPr>
             </a:pPr>
             <a:r>
-              <a:t>前缀复用与重算收益请求</a:t>
+              <a:t>兼容 vLLM/SGLang 前缀复用请求</a:t>
             </a:r>
           </a:p>
         </p:txBody>
@@ -13890,7 +13899,7 @@
               </a:defRPr>
             </a:pPr>
             <a:r>
-              <a:t>L2. KV 语义治理层</a:t>
+              <a:t>L2. 语义与安全校验层</a:t>
             </a:r>
           </a:p>
           <a:p>
@@ -13906,7 +13915,7 @@
               </a:defRPr>
             </a:pPr>
             <a:r>
-              <a:t>KVSemantic 语义目录</a:t>
+              <a:t>6 维语义一致性校验</a:t>
             </a:r>
           </a:p>
           <a:p>
@@ -13922,7 +13931,7 @@
               </a:defRPr>
             </a:pPr>
             <a:r>
-              <a:t>多租户隔离与 Lease 租约</a:t>
+              <a:t>视图租约安全与多租户隔离</a:t>
             </a:r>
           </a:p>
         </p:txBody>
@@ -14003,7 +14012,7 @@
               </a:defRPr>
             </a:pPr>
             <a:r>
-              <a:t>L3. 决策与编译层</a:t>
+              <a:t>L3. 动态决策与编译层</a:t>
             </a:r>
           </a:p>
           <a:p>
@@ -14019,7 +14028,7 @@
               </a:defRPr>
             </a:pPr>
             <a:r>
-              <a:t>动态选路与成本评估引擎</a:t>
+              <a:t>QueryPlan 决策 + 描述符编译</a:t>
             </a:r>
           </a:p>
           <a:p>
@@ -14035,7 +14044,7 @@
               </a:defRPr>
             </a:pPr>
             <a:r>
-              <a:t>异步流水与描述符批量编译</a:t>
+              <a:t>微秒 ROI 评估与异步 Stream 流水</a:t>
             </a:r>
           </a:p>
         </p:txBody>
@@ -14116,7 +14125,7 @@
               </a:defRPr>
             </a:pPr>
             <a:r>
-              <a:t>L4. 硬件极速执行层</a:t>
+              <a:t>L4. 硬件极速执行底座</a:t>
             </a:r>
           </a:p>
           <a:p>
@@ -14132,7 +14141,7 @@
               </a:defRPr>
             </a:pPr>
             <a:r>
-              <a:t>UBMEM / URMA 直达</a:t>
+              <a:t>UBMEM + URMA + SSD Direct</a:t>
             </a:r>
           </a:p>
           <a:p>
@@ -14148,7 +14157,7 @@
               </a:defRPr>
             </a:pPr>
             <a:r>
-              <a:t>微秒总线与 Host 零拷贝</a:t>
+              <a:t>Host CPU 零数据拷贝与硬件直达</a:t>
             </a:r>
           </a:p>
         </p:txBody>
@@ -14293,7 +14302,7 @@
                 </a:solidFill>
                 <a:latin typeface="Microsoft YaHei"/>
               </a:rPr>
-              <a:t>通过构建具备模型语义感知的统一异构存储池，以 </a:t>
+              <a:t>在 Mooncake 开源底座之上，全面注入原厂 </a:t>
             </a:r>
             <a:r>
               <a:rPr sz="1150" b="1">
@@ -14302,7 +14311,7 @@
                 </a:solidFill>
                 <a:latin typeface="Microsoft YaHei"/>
               </a:rPr>
-              <a:t>拓扑亲和传输消除网络拥塞、Host CPU 零数据拷贝打破计算瓶颈、UBMEM 总线直达压缩控制面开销</a:t>
+              <a:t>连续块描述符编译、Host CPU 零数据拷贝、UBMEM 总线直通与 HBM-SSD 直达分层</a:t>
             </a:r>
             <a:r>
               <a:rPr sz="1150" b="0">
@@ -14311,7 +14320,7 @@
                 </a:solidFill>
                 <a:latin typeface="Microsoft YaHei"/>
               </a:rPr>
-              <a:t>，全面释放国产芯片的硬件互联与多级存储潜能。</a:t>
+              <a:t>四大支柱，彻底打破开源软件性能天花板，释放国产硬件极致算力。</a:t>
             </a:r>
           </a:p>
         </p:txBody>
@@ -14365,7 +14374,7 @@
           <a:lstStyle/>
           <a:p>
             <a:pPr>
-              <a:defRPr sz="1900" b="1">
+              <a:defRPr sz="1800" b="1">
                 <a:solidFill>
                   <a:srgbClr val="1E3A8A"/>
                 </a:solidFill>
@@ -14373,7 +14382,7 @@
               </a:defRPr>
             </a:pPr>
             <a:r>
-              <a:t>针对开源不足的方案优势 (2/2)：前置动态收益决策与数据访问安全屏障</a:t>
+              <a:t>针对开源不足的方案优势 (2/2)：描述符编译流水、动态选路与安全守卫时序</a:t>
             </a:r>
           </a:p>
           <a:p>
@@ -14389,7 +14398,7 @@
               </a:defRPr>
             </a:pPr>
             <a:r>
-              <a:t>避免盲目拉取与性能回退，保障多租户隔离与 0 错误消费</a:t>
+              <a:t>利用异构描述符编译器消除网络冲突，通过双 Stream 物理流水掩盖传输时延并构筑安全屏障</a:t>
             </a:r>
           </a:p>
         </p:txBody>
@@ -14525,7 +14534,7 @@
               </a:defRPr>
             </a:pPr>
             <a:r>
-              <a:t>基于实时网络与算力开销的动态选路</a:t>
+              <a:t>QueryPlan 微秒级选路与成本预估</a:t>
             </a:r>
           </a:p>
           <a:p>
@@ -14544,7 +14553,7 @@
               </a:defRPr>
             </a:pPr>
             <a:r>
-              <a:t>★ 收益判定逻辑：</a:t>
+              <a:t>★ 收益判定数学模型：</a:t>
             </a:r>
             <a:r>
               <a:rPr sz="1150" b="0">
@@ -14553,7 +14562,7 @@
                 </a:solidFill>
                 <a:latin typeface="Microsoft YaHei"/>
               </a:rPr>
-              <a:t>拉取与加载总开销 &lt; 本地直接重算耗时（仅在获取明确净加速收益时执行加载，否则主动回退至本地重算）。</a:t>
+              <a:t>拉取与加载总开销 T_load &lt; 本地直接重算耗时 T_prefill（仅在获取明确净加速收益时执行加载，否则主动回退）。</a:t>
             </a:r>
           </a:p>
           <a:p>
@@ -14572,7 +14581,7 @@
               </a:defRPr>
             </a:pPr>
             <a:r>
-              <a:t>★ 前置决策优势：</a:t>
+              <a:t>★ 前置决策彻底闭环：</a:t>
             </a:r>
             <a:r>
               <a:rPr sz="1150" b="0">
@@ -14581,7 +14590,7 @@
                 </a:solidFill>
                 <a:latin typeface="Microsoft YaHei"/>
               </a:rPr>
-              <a:t>查表阶段即完成成本评估。若网络拥塞慢于重算，主动返回重算决策，零硬件描述符申请、零队列浪费、NPU 零空转。</a:t>
+              <a:t>查表阶段即完成成本评估（开销控制在微秒级）。若网络拥塞，主动返回重算决策，零描述符申请、NPU 零空转。</a:t>
             </a:r>
           </a:p>
           <a:p>
@@ -14600,7 +14609,7 @@
               </a:defRPr>
             </a:pPr>
             <a:r>
-              <a:t>★ 对比被动丢弃：</a:t>
+              <a:t>★ 对比开源被动丢弃：</a:t>
             </a:r>
             <a:r>
               <a:rPr sz="1150" b="0">
@@ -14737,7 +14746,7 @@
                 </a:solidFill>
                 <a:latin typeface="Microsoft YaHei"/>
               </a:rPr>
-              <a:t>NPU AICore 执行第 L 层 GEMM（矩阵计算），URMA DMA 在后台异步预取第 L+1 层 KV，运行在独立硬件 Stream。</a:t>
+              <a:t>NPU 内部 AICore 执行第 L 层 GEMM（矩阵计算），URMA DMA 在后台异步预取第 L+1 层 KV，运行在独立硬件 Stream。</a:t>
             </a:r>
           </a:p>
           <a:p>
@@ -14793,7 +14802,7 @@
                 </a:solidFill>
                 <a:latin typeface="Microsoft YaHei"/>
               </a:rPr>
-              <a:t>全模型 32 层流水全掩盖，跨节点网络传输耗时完全隐藏在矩阵计算耗时包络内！</a:t>
+              <a:t>全模型 32 层流水全掩盖，跨节点网络传输耗时完全隐藏在矩阵计算耗时区间内！</a:t>
             </a:r>
           </a:p>
         </p:txBody>
@@ -14874,7 +14883,7 @@
               </a:defRPr>
             </a:pPr>
             <a:r>
-              <a:t>优势三：数据访问安全与多卡同步</a:t>
+              <a:t>优势三：视图租约守卫与多卡同步</a:t>
             </a:r>
           </a:p>
           <a:p>
@@ -14893,7 +14902,7 @@
               </a:defRPr>
             </a:pPr>
             <a:r>
-              <a:t>严格语义权限校验与租约机制</a:t>
+              <a:t>6 维语义校验与张量并行原子保序</a:t>
             </a:r>
           </a:p>
           <a:p>
@@ -14912,7 +14921,7 @@
               </a:defRPr>
             </a:pPr>
             <a:r>
-              <a:t>★ 租户安全隔离：</a:t>
+              <a:t>★ 6 维语义一致性校验：</a:t>
             </a:r>
             <a:r>
               <a:rPr sz="1150" b="0">
@@ -14921,7 +14930,7 @@
                 </a:solidFill>
                 <a:latin typeface="Microsoft YaHei"/>
               </a:rPr>
-              <a:t>引入显式访问凭证与语义身份，严格校验租户权限与内存视图，杜绝越权读取。</a:t>
+              <a:t>对模型、词表、模板、LoRA、就绪位与租约进行 6 维微秒级合法性检查，错误消费精确为 0。</a:t>
             </a:r>
           </a:p>
           <a:p>
@@ -14940,7 +14949,7 @@
               </a:defRPr>
             </a:pPr>
             <a:r>
-              <a:t>★ 一致性与租约校验：</a:t>
+              <a:t>★ 视图租约安全守卫：</a:t>
             </a:r>
             <a:r>
               <a:rPr sz="1150" b="0">
@@ -14949,7 +14958,7 @@
                 </a:solidFill>
                 <a:latin typeface="Microsoft YaHei"/>
               </a:rPr>
-              <a:t>在消费前严格校验模型架构、词表、提示词模板及租约有效性，杜绝未写完、已过期或失效的缓存数据被错误读取。</a:t>
+              <a:t>安全捕获远端超时或异常中断并快速回滚至本地重算，彻底阻断跨节点故障扩散。</a:t>
             </a:r>
           </a:p>
           <a:p>
@@ -14968,7 +14977,7 @@
               </a:defRPr>
             </a:pPr>
             <a:r>
-              <a:t>★ 多卡原子保序：</a:t>
+              <a:t>★ 多卡状态同步：</a:t>
             </a:r>
             <a:r>
               <a:rPr sz="1150" b="0">
@@ -14977,7 +14986,7 @@
                 </a:solidFill>
                 <a:latin typeface="Microsoft YaHei"/>
               </a:rPr>
-              <a:t>支持张量并行多卡原子并发选路，消除跨卡到达时间差导致的集合通信死等。</a:t>
+              <a:t>张量并行 (TP=8) 多卡状态同步保持微秒级响应，杜绝跨卡到达时间差导致的集合通信死锁。</a:t>
             </a:r>
           </a:p>
         </p:txBody>
@@ -15139,7 +15148,7 @@
               </a:defRPr>
             </a:pPr>
             <a:r>
-              <a:t>Stream 1 (AICore 算力): [ Layer L GEMM 矩阵计算耗时包络 ]</a:t>
+              <a:t>Stream 1 (AICore 算力): [ Layer L GEMM 矩阵计算耗时区间 ]</a:t>
             </a:r>
           </a:p>
           <a:p>
@@ -15236,7 +15245,7 @@
               </a:defRPr>
             </a:pPr>
             <a:r>
-              <a:t>数据安全校验: [ 语义与权限严格校验 ] ➔ [ 就绪状态检查 ]</a:t>
+              <a:t>数据安全校验: [ 6 维语义合法性检查 ] ➔ [ 视图租约安全守护 ]</a:t>
             </a:r>
           </a:p>
           <a:p>
@@ -15252,7 +15261,7 @@
               </a:defRPr>
             </a:pPr>
             <a:r>
-              <a:t>租约生命周期: [ 显式租约安全防护 ] ➔ 杜绝脏数据，错误消费为 0</a:t>
+              <a:t>张量并行协同: [ 多卡状态同步微秒级响应 ] ➔ 0 死锁，0 错误消费</a:t>
             </a:r>
           </a:p>
         </p:txBody>
@@ -15397,7 +15406,7 @@
                 </a:solidFill>
                 <a:latin typeface="Microsoft YaHei"/>
               </a:rPr>
-              <a:t>相比开源方案的盲目拉取与事后被动丢弃，本项目通过 </a:t>
+              <a:t>相比 Mooncake 的盲目拉取与事后被动丢弃，本项目通过 </a:t>
             </a:r>
             <a:r>
               <a:rPr sz="1150" b="1">
@@ -15406,7 +15415,7 @@
                 </a:solidFill>
                 <a:latin typeface="Microsoft YaHei"/>
               </a:rPr>
-              <a:t>前置量化决策确保每次加载均获正向收益</a:t>
+              <a:t>QueryPlan 前置动态量化决策确保每次加载获明确净收益</a:t>
             </a:r>
             <a:r>
               <a:rPr sz="1150" b="0">
@@ -15442,7 +15451,7 @@
                 </a:solidFill>
                 <a:latin typeface="Microsoft YaHei"/>
               </a:rPr>
-              <a:t>严格的语义校验与租约机制实现 0 错误消费与多卡安全协同</a:t>
+              <a:t>6 维语义校验与多卡状态同步实现 0 错误消费与 0 集合通信死锁</a:t>
             </a:r>
             <a:r>
               <a:rPr sz="1150" b="0">
@@ -15505,7 +15514,7 @@
           <a:lstStyle/>
           <a:p>
             <a:pPr>
-              <a:defRPr sz="1900" b="1">
+              <a:defRPr sz="1800" b="1">
                 <a:solidFill>
                   <a:srgbClr val="1E3A8A"/>
                 </a:solidFill>
@@ -15721,7 +15730,7 @@
                 </a:solidFill>
                 <a:latin typeface="Microsoft YaHei"/>
               </a:rPr>
-              <a:t>通过 KVSemanticIdentity 将 Layer 与 TP Rank 精准映射至直连硬件物理队列。</a:t>
+              <a:t>通过多维度语义标识将 Layer 与 TP Rank 精准映射至直连硬件物理队列。</a:t>
             </a:r>
           </a:p>
           <a:p>
@@ -15933,7 +15942,7 @@
                 </a:solidFill>
                 <a:latin typeface="Microsoft YaHei"/>
               </a:rPr>
-              <a:t>全模型 32 层流水全掩盖，把网络时延完全压缩进算力耗时包络！</a:t>
+              <a:t>全模型 32 层流水全掩盖，把网络传输时延完全压缩进算力计算耗时窗口！</a:t>
             </a:r>
           </a:p>
         </p:txBody>
@@ -16014,7 +16023,7 @@
               </a:defRPr>
             </a:pPr>
             <a:r>
-              <a:t>协同技术三：硬件 QoS 队列与零数据拷贝</a:t>
+              <a:t>协同技术三：硬件 QoS 队列与 Host 零拷贝</a:t>
             </a:r>
           </a:p>
           <a:p>
@@ -16033,7 +16042,7 @@
               </a:defRPr>
             </a:pPr>
             <a:r>
-              <a:t>[网卡 QoS 队列 ➔ Host 零拷贝协同]</a:t>
+              <a:t>[网卡 QoS 队列 ➔ Host 零数据拷贝协同]</a:t>
             </a:r>
           </a:p>
           <a:p>
@@ -16080,7 +16089,7 @@
               </a:defRPr>
             </a:pPr>
             <a:r>
-              <a:t>• CPU 不参与数据搬运：</a:t>
+              <a:t>• Host CPU 零数据拷贝：</a:t>
             </a:r>
             <a:r>
               <a:rPr sz="1150" b="0">
@@ -16089,7 +16098,7 @@
                 </a:solidFill>
                 <a:latin typeface="Microsoft YaHei"/>
               </a:rPr>
-              <a:t>控制面下发描述符后，数据搬运 100% 硬件 DMA 执行，消除 CPU 内存拷贝。</a:t>
+              <a:t>CPU 仅负责下发控制指令，数据搬运 100% 硬件直达，Payload 严格为 0。</a:t>
             </a:r>
           </a:p>
           <a:p>
@@ -16117,7 +16126,7 @@
                 </a:solidFill>
                 <a:latin typeface="Microsoft YaHei"/>
               </a:rPr>
-              <a:t>后台进行大规模 SSD 迁移时，前台实时 Decode（解码生成）的 TPOT 抖动严格 &lt; 3%。</a:t>
+              <a:t>后台进行大规模 SSD 迁移时，前台在线推理 TPOT 抖动严格 &lt; 3%。</a:t>
             </a:r>
           </a:p>
         </p:txBody>
@@ -16292,7 +16301,7 @@
               </a:defRPr>
             </a:pPr>
             <a:r>
-              <a:t>• 时延压缩至 &lt; 5 µs：</a:t>
+              <a:t>• 微秒级极速响应：</a:t>
             </a:r>
             <a:r>
               <a:rPr sz="1150" b="0">
@@ -16301,7 +16310,7 @@
                 </a:solidFill>
                 <a:latin typeface="Microsoft YaHei"/>
               </a:rPr>
-              <a:t>控制面时延从上百微秒压缩至 5 µs 内，微秒级驱动 URMA 正文搬运。</a:t>
+              <a:t>控制面时延压缩至微秒级到几十微秒，极速驱动 URMA 正文搬运。</a:t>
             </a:r>
           </a:p>
         </p:txBody>
@@ -16518,7 +16527,7 @@
           <a:lstStyle/>
           <a:p>
             <a:pPr>
-              <a:defRPr sz="1900" b="1">
+              <a:defRPr sz="1800" b="1">
                 <a:solidFill>
                   <a:srgbClr val="1E3A8A"/>
                 </a:solidFill>
@@ -16636,8 +16645,8 @@
         </p:nvSpPr>
         <p:spPr>
           <a:xfrm>
-            <a:off x="640080" y="1133856"/>
-            <a:ext cx="6099048" cy="2487168"/>
+            <a:off x="685800" y="1133856"/>
+            <a:ext cx="5989320" cy="2556000"/>
           </a:xfrm>
           <a:prstGeom prst="rect">
             <a:avLst/>
@@ -16659,7 +16668,7 @@
               </a:defRPr>
             </a:pPr>
             <a:r>
-              <a:t>1. 端到端 TTFT 数学建模与 c 的 4 级条件漏斗推导 (1K Token)</a:t>
+              <a:t>1. 端到端 TTFT 数学建模与正价值消费率 c 漏斗推导 (1K Token)</a:t>
             </a:r>
           </a:p>
           <a:p>
@@ -16681,7 +16690,7 @@
           <a:p>
             <a:pPr>
               <a:spcBef>
-                <a:spcPts val="200"/>
+                <a:spcPts val="100"/>
               </a:spcBef>
               <a:defRPr sz="950" b="1">
                 <a:solidFill>
@@ -16691,102 +16700,207 @@
               </a:defRPr>
             </a:pPr>
             <a:r>
-              <a:t>【正价值消费率 c 计算方法】 c = r × u = r × (u1 × u2 × u3 × u4)  [4 级条件漏斗连乘]</a:t>
+              <a:t>【正价值消费率】 c = r × u = r × (u1 × u2 × u3 × u4)  [4 级条件漏斗逐级连乘]</a:t>
+            </a:r>
+          </a:p>
+          <a:p>
+            <a:pPr>
+              <a:spcBef>
+                <a:spcPts val="300"/>
+              </a:spcBef>
+              <a:defRPr sz="1000" b="1">
+                <a:solidFill>
+                  <a:srgbClr val="1E3A8A"/>
+                </a:solidFill>
+                <a:latin typeface="Microsoft YaHei"/>
+              </a:defRPr>
+            </a:pPr>
+            <a:r>
+              <a:t>▶ u1 候选发现与语义保持 </a:t>
+            </a:r>
+            <a:r>
+              <a:rPr sz="950" b="1">
+                <a:solidFill>
+                  <a:srgbClr val="1D4ED8"/>
+                </a:solidFill>
+                <a:latin typeface="Microsoft YaHei"/>
+              </a:rPr>
+              <a:t>(开源 90% ➔ 本项目 97%)</a:t>
             </a:r>
           </a:p>
           <a:p>
             <a:pPr>
               <a:lnSpc>
-                <a:spcPct val="116000"/>
+                <a:spcPct val="115000"/>
               </a:lnSpc>
               <a:spcBef>
-                <a:spcPts val="200"/>
+                <a:spcPts val="100"/>
               </a:spcBef>
-              <a:defRPr sz="950" b="1">
-                <a:solidFill>
-                  <a:srgbClr val="0F172A"/>
-                </a:solidFill>
-                <a:latin typeface="Microsoft YaHei"/>
-              </a:defRPr>
-            </a:pPr>
-            <a:r>
-              <a:t>• u1 语义与候选保持 (90%➔97%)：</a:t>
-            </a:r>
-            <a:r>
-              <a:rPr sz="919" b="0">
+              <a:defRPr sz="919" b="0">
                 <a:solidFill>
                   <a:srgbClr val="475569"/>
                 </a:solidFill>
                 <a:latin typeface="Microsoft YaHei"/>
+              </a:defRPr>
+            </a:pPr>
+            <a:r>
+              <a:t>   • 统一语义标识 · 缓存感知智能路由 · 全局生命周期治理</a:t>
+            </a:r>
+          </a:p>
+          <a:p>
+            <a:pPr>
+              <a:spcBef>
+                <a:spcPts val="300"/>
+              </a:spcBef>
+              <a:defRPr sz="1000" b="1">
+                <a:solidFill>
+                  <a:srgbClr val="1E3A8A"/>
+                </a:solidFill>
+                <a:latin typeface="Microsoft YaHei"/>
+              </a:defRPr>
+            </a:pPr>
+            <a:r>
+              <a:t>▶ u2 资格校验与租约通过 </a:t>
+            </a:r>
+            <a:r>
+              <a:rPr sz="950" b="1">
+                <a:solidFill>
+                  <a:srgbClr val="1D4ED8"/>
+                </a:solidFill>
+                <a:latin typeface="Microsoft YaHei"/>
               </a:rPr>
-              <a:t>统一语义身份 + 缓存感知路由 + 全局生命周期治理</a:t>
+              <a:t>(开源 95% ➔ 本项目 99%)</a:t>
             </a:r>
           </a:p>
           <a:p>
             <a:pPr>
               <a:lnSpc>
-                <a:spcPct val="116000"/>
+                <a:spcPct val="115000"/>
               </a:lnSpc>
               <a:spcBef>
-                <a:spcPts val="200"/>
+                <a:spcPts val="100"/>
               </a:spcBef>
-              <a:defRPr sz="950" b="1">
-                <a:solidFill>
-                  <a:srgbClr val="0F172A"/>
-                </a:solidFill>
-                <a:latin typeface="Microsoft YaHei"/>
-              </a:defRPr>
-            </a:pPr>
-            <a:r>
-              <a:t>• u2 资格与租约通过 (95%➔99%)：</a:t>
-            </a:r>
-            <a:r>
-              <a:rPr sz="919" b="0">
+              <a:defRPr sz="919" b="0">
                 <a:solidFill>
                   <a:srgbClr val="475569"/>
                 </a:solidFill>
                 <a:latin typeface="Microsoft YaHei"/>
+              </a:defRPr>
+            </a:pPr>
+            <a:r>
+              <a:t>   • 总线元数据快路径 · 显式租约安全隔离 · 多卡状态同步协同</a:t>
+            </a:r>
+          </a:p>
+          <a:p>
+            <a:pPr>
+              <a:spcBef>
+                <a:spcPts val="300"/>
+              </a:spcBef>
+              <a:defRPr sz="1000" b="1">
+                <a:solidFill>
+                  <a:srgbClr val="1E3A8A"/>
+                </a:solidFill>
+                <a:latin typeface="Microsoft YaHei"/>
+              </a:defRPr>
+            </a:pPr>
+            <a:r>
+              <a:t>▶ u3 物理路径直达成功 </a:t>
+            </a:r>
+            <a:r>
+              <a:rPr sz="950" b="1">
+                <a:solidFill>
+                  <a:srgbClr val="1D4ED8"/>
+                </a:solidFill>
+                <a:latin typeface="Microsoft YaHei"/>
               </a:rPr>
-              <a:t>共享内存元数据快路径 + 显式租约机制 + 多卡状态同步</a:t>
+              <a:t>(开源 95% ➔ 本项目 99%)</a:t>
             </a:r>
           </a:p>
           <a:p>
             <a:pPr>
               <a:lnSpc>
-                <a:spcPct val="116000"/>
+                <a:spcPct val="115000"/>
               </a:lnSpc>
               <a:spcBef>
-                <a:spcPts val="200"/>
+                <a:spcPts val="100"/>
               </a:spcBef>
-              <a:defRPr sz="950" b="1">
-                <a:solidFill>
-                  <a:srgbClr val="0F172A"/>
-                </a:solidFill>
-                <a:latin typeface="Microsoft YaHei"/>
-              </a:defRPr>
-            </a:pPr>
-            <a:r>
-              <a:t>• u3 实际路径成功 (95%➔99%)：</a:t>
-            </a:r>
-            <a:r>
-              <a:rPr sz="919" b="0">
+              <a:defRPr sz="919" b="0">
                 <a:solidFill>
                   <a:srgbClr val="475569"/>
                 </a:solidFill>
                 <a:latin typeface="Microsoft YaHei"/>
+              </a:defRPr>
+            </a:pPr>
+            <a:r>
+              <a:t>   • 硬件物理能力矩阵 · 芯片直达传输 DMA · 有界平滑重算回退</a:t>
+            </a:r>
+          </a:p>
+          <a:p>
+            <a:pPr>
+              <a:spcBef>
+                <a:spcPts val="300"/>
+              </a:spcBef>
+              <a:defRPr sz="1000" b="1">
+                <a:solidFill>
+                  <a:srgbClr val="1E3A8A"/>
+                </a:solidFill>
+                <a:latin typeface="Microsoft YaHei"/>
+              </a:defRPr>
+            </a:pPr>
+            <a:r>
+              <a:t>▶ u4 前置动态净收益比 </a:t>
+            </a:r>
+            <a:r>
+              <a:rPr sz="950" b="1">
+                <a:solidFill>
+                  <a:srgbClr val="1D4ED8"/>
+                </a:solidFill>
+                <a:latin typeface="Microsoft YaHei"/>
               </a:rPr>
-              <a:t>硬件能力感知矩阵 + 芯片直达传输 + 有界平滑回退</a:t>
+              <a:t>(开源 98% ➔ 本项目 99%)</a:t>
             </a:r>
           </a:p>
           <a:p>
             <a:pPr>
               <a:lnSpc>
-                <a:spcPct val="116000"/>
+                <a:spcPct val="115000"/>
               </a:lnSpc>
               <a:spcBef>
-                <a:spcPts val="200"/>
+                <a:spcPts val="100"/>
               </a:spcBef>
-              <a:defRPr sz="950" b="1">
+              <a:defRPr sz="919" b="0">
+                <a:solidFill>
+                  <a:srgbClr val="475569"/>
+                </a:solidFill>
+                <a:latin typeface="Microsoft YaHei"/>
+              </a:defRPr>
+            </a:pPr>
+            <a:r>
+              <a:t>   • 微秒选路决策引擎 · 实时队列时延观测 · 自适应负载熔断</a:t>
+            </a:r>
+          </a:p>
+          <a:p>
+            <a:pPr>
+              <a:spcBef>
+                <a:spcPts val="400"/>
+              </a:spcBef>
+              <a:defRPr sz="1000" b="1">
+                <a:solidFill>
+                  <a:srgbClr val="047857"/>
+                </a:solidFill>
+                <a:latin typeface="Microsoft YaHei"/>
+              </a:defRPr>
+            </a:pPr>
+            <a:r>
+              <a:t>★ 综合转化率 u：开源 79.60% ➔ 本项目 94.12% (+14.5%)</a:t>
+            </a:r>
+          </a:p>
+          <a:p>
+            <a:pPr>
+              <a:spcBef>
+                <a:spcPts val="100"/>
+              </a:spcBef>
+              <a:defRPr sz="919" b="0">
                 <a:solidFill>
                   <a:srgbClr val="0F172A"/>
                 </a:solidFill>
@@ -16794,44 +16908,7 @@
               </a:defRPr>
             </a:pPr>
             <a:r>
-              <a:t>• u4 正收益判定比 (98%➔99%)：</a:t>
-            </a:r>
-            <a:r>
-              <a:rPr sz="919" b="0">
-                <a:solidFill>
-                  <a:srgbClr val="475569"/>
-                </a:solidFill>
-                <a:latin typeface="Microsoft YaHei"/>
-              </a:rPr>
-              <a:t>动态决策评估引擎 + 实时队列观测与自适应熔断</a:t>
-            </a:r>
-          </a:p>
-          <a:p>
-            <a:pPr>
-              <a:lnSpc>
-                <a:spcPct val="116000"/>
-              </a:lnSpc>
-              <a:spcBef>
-                <a:spcPts val="200"/>
-              </a:spcBef>
-              <a:defRPr sz="950" b="1">
-                <a:solidFill>
-                  <a:srgbClr val="0F172A"/>
-                </a:solidFill>
-                <a:latin typeface="Microsoft YaHei"/>
-              </a:defRPr>
-            </a:pPr>
-            <a:r>
-              <a:t>• 综合转化率 u 与时延预算：</a:t>
-            </a:r>
-            <a:r>
-              <a:rPr sz="919" b="0">
-                <a:solidFill>
-                  <a:srgbClr val="475569"/>
-                </a:solidFill>
-                <a:latin typeface="Microsoft YaHei"/>
-              </a:rPr>
-              <a:t>u: 开源 79.60% ➔ 本项目 94.12%; T_fixed: 1.6 ➔ 0.575ms; T_load: 10.0 ➔ 4.5ms</a:t>
+              <a:t>   • 开销预算: 固定开销 T_fixed: 1.6 ➔ 0.575ms  |  数据加载 T_load: 10.0 ➔ 4.5ms</a:t>
             </a:r>
           </a:p>
         </p:txBody>
@@ -16845,8 +16922,8 @@
           <p:nvPr/>
         </p:nvGraphicFramePr>
         <p:xfrm>
-          <a:off x="685800" y="3621024"/>
-          <a:ext cx="5989320" cy="2139696"/>
+          <a:off x="685800" y="3799584"/>
+          <a:ext cx="5989320" cy="1691640"/>
         </p:xfrm>
         <a:graphic>
           <a:graphicData uri="http://schemas.openxmlformats.org/drawingml/2006/table">
@@ -16863,7 +16940,7 @@
                 <a:gridCol w="868680"/>
                 <a:gridCol w="822960"/>
               </a:tblGrid>
-              <a:tr h="427939">
+              <a:tr h="338328">
                 <a:tc>
                   <a:txBody>
                     <a:bodyPr wrap="none" lIns="18288" rIns="18288" tIns="36576" bIns="36576"/>
@@ -16882,7 +16959,7 @@
                       </a:r>
                     </a:p>
                   </a:txBody>
-                  <a:tcPr>
+                  <a:tcPr anchor="ctr">
                     <a:solidFill>
                       <a:srgbClr val="1E3A8A"/>
                     </a:solidFill>
@@ -16906,7 +16983,7 @@
                       </a:r>
                     </a:p>
                   </a:txBody>
-                  <a:tcPr>
+                  <a:tcPr anchor="ctr">
                     <a:solidFill>
                       <a:srgbClr val="1E3A8A"/>
                     </a:solidFill>
@@ -16930,7 +17007,7 @@
                       </a:r>
                     </a:p>
                   </a:txBody>
-                  <a:tcPr>
+                  <a:tcPr anchor="ctr">
                     <a:solidFill>
                       <a:srgbClr val="1E3A8A"/>
                     </a:solidFill>
@@ -16954,7 +17031,7 @@
                       </a:r>
                     </a:p>
                   </a:txBody>
-                  <a:tcPr>
+                  <a:tcPr anchor="ctr">
                     <a:solidFill>
                       <a:srgbClr val="1E3A8A"/>
                     </a:solidFill>
@@ -16978,7 +17055,7 @@
                       </a:r>
                     </a:p>
                   </a:txBody>
-                  <a:tcPr>
+                  <a:tcPr anchor="ctr">
                     <a:solidFill>
                       <a:srgbClr val="1E3A8A"/>
                     </a:solidFill>
@@ -17002,7 +17079,7 @@
                       </a:r>
                     </a:p>
                   </a:txBody>
-                  <a:tcPr>
+                  <a:tcPr anchor="ctr">
                     <a:solidFill>
                       <a:srgbClr val="1E3A8A"/>
                     </a:solidFill>
@@ -17026,14 +17103,14 @@
                       </a:r>
                     </a:p>
                   </a:txBody>
-                  <a:tcPr>
+                  <a:tcPr anchor="ctr">
                     <a:solidFill>
                       <a:srgbClr val="1E3A8A"/>
                     </a:solidFill>
                   </a:tcPr>
                 </a:tc>
               </a:tr>
-              <a:tr h="427939">
+              <a:tr h="338328">
                 <a:tc>
                   <a:txBody>
                     <a:bodyPr wrap="square" lIns="18288" rIns="18288" tIns="36576" bIns="36576"/>
@@ -17052,7 +17129,7 @@
                       </a:r>
                     </a:p>
                   </a:txBody>
-                  <a:tcPr>
+                  <a:tcPr anchor="ctr">
                     <a:solidFill>
                       <a:srgbClr val="FFFFFF"/>
                     </a:solidFill>
@@ -17076,7 +17153,7 @@
                       </a:r>
                     </a:p>
                   </a:txBody>
-                  <a:tcPr>
+                  <a:tcPr anchor="ctr">
                     <a:solidFill>
                       <a:srgbClr val="FFFFFF"/>
                     </a:solidFill>
@@ -17100,7 +17177,7 @@
                       </a:r>
                     </a:p>
                   </a:txBody>
-                  <a:tcPr>
+                  <a:tcPr anchor="ctr">
                     <a:solidFill>
                       <a:srgbClr val="FFFFFF"/>
                     </a:solidFill>
@@ -17124,7 +17201,7 @@
                       </a:r>
                     </a:p>
                   </a:txBody>
-                  <a:tcPr>
+                  <a:tcPr anchor="ctr">
                     <a:solidFill>
                       <a:srgbClr val="FFFFFF"/>
                     </a:solidFill>
@@ -17148,7 +17225,7 @@
                       </a:r>
                     </a:p>
                   </a:txBody>
-                  <a:tcPr>
+                  <a:tcPr anchor="ctr">
                     <a:solidFill>
                       <a:srgbClr val="FFFFFF"/>
                     </a:solidFill>
@@ -17172,7 +17249,7 @@
                       </a:r>
                     </a:p>
                   </a:txBody>
-                  <a:tcPr>
+                  <a:tcPr anchor="ctr">
                     <a:solidFill>
                       <a:srgbClr val="FFFFFF"/>
                     </a:solidFill>
@@ -17196,14 +17273,14 @@
                       </a:r>
                     </a:p>
                   </a:txBody>
-                  <a:tcPr>
+                  <a:tcPr anchor="ctr">
                     <a:solidFill>
                       <a:srgbClr val="FFFFFF"/>
                     </a:solidFill>
                   </a:tcPr>
                 </a:tc>
               </a:tr>
-              <a:tr h="427939">
+              <a:tr h="338328">
                 <a:tc>
                   <a:txBody>
                     <a:bodyPr wrap="square" lIns="18288" rIns="18288" tIns="36576" bIns="36576"/>
@@ -17222,7 +17299,7 @@
                       </a:r>
                     </a:p>
                   </a:txBody>
-                  <a:tcPr>
+                  <a:tcPr anchor="ctr">
                     <a:solidFill>
                       <a:srgbClr val="F1F5F9"/>
                     </a:solidFill>
@@ -17246,7 +17323,7 @@
                       </a:r>
                     </a:p>
                   </a:txBody>
-                  <a:tcPr>
+                  <a:tcPr anchor="ctr">
                     <a:solidFill>
                       <a:srgbClr val="F1F5F9"/>
                     </a:solidFill>
@@ -17270,7 +17347,7 @@
                       </a:r>
                     </a:p>
                   </a:txBody>
-                  <a:tcPr>
+                  <a:tcPr anchor="ctr">
                     <a:solidFill>
                       <a:srgbClr val="F1F5F9"/>
                     </a:solidFill>
@@ -17294,7 +17371,7 @@
                       </a:r>
                     </a:p>
                   </a:txBody>
-                  <a:tcPr>
+                  <a:tcPr anchor="ctr">
                     <a:solidFill>
                       <a:srgbClr val="F1F5F9"/>
                     </a:solidFill>
@@ -17318,7 +17395,7 @@
                       </a:r>
                     </a:p>
                   </a:txBody>
-                  <a:tcPr>
+                  <a:tcPr anchor="ctr">
                     <a:solidFill>
                       <a:srgbClr val="F1F5F9"/>
                     </a:solidFill>
@@ -17342,7 +17419,7 @@
                       </a:r>
                     </a:p>
                   </a:txBody>
-                  <a:tcPr>
+                  <a:tcPr anchor="ctr">
                     <a:solidFill>
                       <a:srgbClr val="F1F5F9"/>
                     </a:solidFill>
@@ -17366,14 +17443,14 @@
                       </a:r>
                     </a:p>
                   </a:txBody>
-                  <a:tcPr>
+                  <a:tcPr anchor="ctr">
                     <a:solidFill>
                       <a:srgbClr val="F1F5F9"/>
                     </a:solidFill>
                   </a:tcPr>
                 </a:tc>
               </a:tr>
-              <a:tr h="427939">
+              <a:tr h="338328">
                 <a:tc>
                   <a:txBody>
                     <a:bodyPr wrap="square" lIns="18288" rIns="18288" tIns="36576" bIns="36576"/>
@@ -17392,7 +17469,7 @@
                       </a:r>
                     </a:p>
                   </a:txBody>
-                  <a:tcPr>
+                  <a:tcPr anchor="ctr">
                     <a:solidFill>
                       <a:srgbClr val="FFFFFF"/>
                     </a:solidFill>
@@ -17416,7 +17493,7 @@
                       </a:r>
                     </a:p>
                   </a:txBody>
-                  <a:tcPr>
+                  <a:tcPr anchor="ctr">
                     <a:solidFill>
                       <a:srgbClr val="FFFFFF"/>
                     </a:solidFill>
@@ -17440,7 +17517,7 @@
                       </a:r>
                     </a:p>
                   </a:txBody>
-                  <a:tcPr>
+                  <a:tcPr anchor="ctr">
                     <a:solidFill>
                       <a:srgbClr val="FFFFFF"/>
                     </a:solidFill>
@@ -17464,7 +17541,7 @@
                       </a:r>
                     </a:p>
                   </a:txBody>
-                  <a:tcPr>
+                  <a:tcPr anchor="ctr">
                     <a:solidFill>
                       <a:srgbClr val="FFFFFF"/>
                     </a:solidFill>
@@ -17488,7 +17565,7 @@
                       </a:r>
                     </a:p>
                   </a:txBody>
-                  <a:tcPr>
+                  <a:tcPr anchor="ctr">
                     <a:solidFill>
                       <a:srgbClr val="FFFFFF"/>
                     </a:solidFill>
@@ -17512,7 +17589,7 @@
                       </a:r>
                     </a:p>
                   </a:txBody>
-                  <a:tcPr>
+                  <a:tcPr anchor="ctr">
                     <a:solidFill>
                       <a:srgbClr val="FFFFFF"/>
                     </a:solidFill>
@@ -17536,14 +17613,14 @@
                       </a:r>
                     </a:p>
                   </a:txBody>
-                  <a:tcPr>
+                  <a:tcPr anchor="ctr">
                     <a:solidFill>
                       <a:srgbClr val="FFFFFF"/>
                     </a:solidFill>
                   </a:tcPr>
                 </a:tc>
               </a:tr>
-              <a:tr h="427940">
+              <a:tr h="338328">
                 <a:tc>
                   <a:txBody>
                     <a:bodyPr wrap="square" lIns="18288" rIns="18288" tIns="36576" bIns="36576"/>
@@ -17562,7 +17639,7 @@
                       </a:r>
                     </a:p>
                   </a:txBody>
-                  <a:tcPr>
+                  <a:tcPr anchor="ctr">
                     <a:solidFill>
                       <a:srgbClr val="F1F5F9"/>
                     </a:solidFill>
@@ -17586,7 +17663,7 @@
                       </a:r>
                     </a:p>
                   </a:txBody>
-                  <a:tcPr>
+                  <a:tcPr anchor="ctr">
                     <a:solidFill>
                       <a:srgbClr val="F1F5F9"/>
                     </a:solidFill>
@@ -17610,7 +17687,7 @@
                       </a:r>
                     </a:p>
                   </a:txBody>
-                  <a:tcPr>
+                  <a:tcPr anchor="ctr">
                     <a:solidFill>
                       <a:srgbClr val="F1F5F9"/>
                     </a:solidFill>
@@ -17634,7 +17711,7 @@
                       </a:r>
                     </a:p>
                   </a:txBody>
-                  <a:tcPr>
+                  <a:tcPr anchor="ctr">
                     <a:solidFill>
                       <a:srgbClr val="F1F5F9"/>
                     </a:solidFill>
@@ -17658,7 +17735,7 @@
                       </a:r>
                     </a:p>
                   </a:txBody>
-                  <a:tcPr>
+                  <a:tcPr anchor="ctr">
                     <a:solidFill>
                       <a:srgbClr val="F1F5F9"/>
                     </a:solidFill>
@@ -17682,7 +17759,7 @@
                       </a:r>
                     </a:p>
                   </a:txBody>
-                  <a:tcPr>
+                  <a:tcPr anchor="ctr">
                     <a:solidFill>
                       <a:srgbClr val="F1F5F9"/>
                     </a:solidFill>
@@ -17706,7 +17783,7 @@
                       </a:r>
                     </a:p>
                   </a:txBody>
-                  <a:tcPr>
+                  <a:tcPr anchor="ctr">
                     <a:solidFill>
                       <a:srgbClr val="F1F5F9"/>
                     </a:solidFill>
@@ -17857,7 +17934,7 @@
                       </a:r>
                     </a:p>
                   </a:txBody>
-                  <a:tcPr>
+                  <a:tcPr anchor="ctr">
                     <a:solidFill>
                       <a:srgbClr val="1E3A8A"/>
                     </a:solidFill>
@@ -17881,7 +17958,7 @@
                       </a:r>
                     </a:p>
                   </a:txBody>
-                  <a:tcPr>
+                  <a:tcPr anchor="ctr">
                     <a:solidFill>
                       <a:srgbClr val="1E3A8A"/>
                     </a:solidFill>
@@ -17905,7 +17982,7 @@
                       </a:r>
                     </a:p>
                   </a:txBody>
-                  <a:tcPr>
+                  <a:tcPr anchor="ctr">
                     <a:solidFill>
                       <a:srgbClr val="1E3A8A"/>
                     </a:solidFill>
@@ -17929,7 +18006,7 @@
                       </a:r>
                     </a:p>
                   </a:txBody>
-                  <a:tcPr>
+                  <a:tcPr anchor="ctr">
                     <a:solidFill>
                       <a:srgbClr val="1E3A8A"/>
                     </a:solidFill>
@@ -17958,7 +18035,7 @@
                       </a:r>
                     </a:p>
                   </a:txBody>
-                  <a:tcPr>
+                  <a:tcPr anchor="ctr">
                     <a:solidFill>
                       <a:srgbClr val="FFFFFF"/>
                     </a:solidFill>
@@ -17985,7 +18062,7 @@
                       </a:r>
                     </a:p>
                   </a:txBody>
-                  <a:tcPr>
+                  <a:tcPr anchor="ctr">
                     <a:solidFill>
                       <a:srgbClr val="FFFFFF"/>
                     </a:solidFill>
@@ -18012,7 +18089,7 @@
                       </a:r>
                     </a:p>
                   </a:txBody>
-                  <a:tcPr>
+                  <a:tcPr anchor="ctr">
                     <a:solidFill>
                       <a:srgbClr val="FFFFFF"/>
                     </a:solidFill>
@@ -18043,7 +18120,7 @@
                       </a:r>
                     </a:p>
                   </a:txBody>
-                  <a:tcPr>
+                  <a:tcPr anchor="ctr">
                     <a:solidFill>
                       <a:srgbClr val="FFFFFF"/>
                     </a:solidFill>
@@ -18072,7 +18149,7 @@
                       </a:r>
                     </a:p>
                   </a:txBody>
-                  <a:tcPr>
+                  <a:tcPr anchor="ctr">
                     <a:solidFill>
                       <a:srgbClr val="FFFFFF"/>
                     </a:solidFill>
@@ -18099,7 +18176,7 @@
                       </a:r>
                     </a:p>
                   </a:txBody>
-                  <a:tcPr>
+                  <a:tcPr anchor="ctr">
                     <a:solidFill>
                       <a:srgbClr val="FFFFFF"/>
                     </a:solidFill>
@@ -18126,7 +18203,7 @@
                       </a:r>
                     </a:p>
                   </a:txBody>
-                  <a:tcPr>
+                  <a:tcPr anchor="ctr">
                     <a:solidFill>
                       <a:srgbClr val="FFFFFF"/>
                     </a:solidFill>
@@ -18157,7 +18234,7 @@
                       </a:r>
                     </a:p>
                   </a:txBody>
-                  <a:tcPr>
+                  <a:tcPr anchor="ctr">
                     <a:solidFill>
                       <a:srgbClr val="FFFFFF"/>
                     </a:solidFill>
@@ -18186,7 +18263,7 @@
                       </a:r>
                     </a:p>
                   </a:txBody>
-                  <a:tcPr>
+                  <a:tcPr anchor="ctr">
                     <a:solidFill>
                       <a:srgbClr val="FFFFFF"/>
                     </a:solidFill>
@@ -18213,7 +18290,7 @@
                       </a:r>
                     </a:p>
                   </a:txBody>
-                  <a:tcPr>
+                  <a:tcPr anchor="ctr">
                     <a:solidFill>
                       <a:srgbClr val="FFFFFF"/>
                     </a:solidFill>
@@ -18240,7 +18317,7 @@
                       </a:r>
                     </a:p>
                   </a:txBody>
-                  <a:tcPr>
+                  <a:tcPr anchor="ctr">
                     <a:solidFill>
                       <a:srgbClr val="FFFFFF"/>
                     </a:solidFill>
@@ -18271,7 +18348,7 @@
                       </a:r>
                     </a:p>
                   </a:txBody>
-                  <a:tcPr>
+                  <a:tcPr anchor="ctr">
                     <a:solidFill>
                       <a:srgbClr val="FFFFFF"/>
                     </a:solidFill>
@@ -18393,11 +18470,11 @@
               </a:defRPr>
             </a:pPr>
             <a:r>
-              <a:t>• 开源组合门槛: 1.6 / (60 - 10) = 3.2% (1K 需 32 tokens)</a:t>
+              <a:t>• 原生 Mooncake 门槛: 1.6 / (60 - 10) = 3.2% (1K 需 32 tokens)</a:t>
             </a:r>
             <a:br/>
             <a:r>
-              <a:t>• 本项目门槛:   0.575 / (60 - 4.5) = 1.0% (1K 仅需 10 tokens 即正收益)</a:t>
+              <a:t>• 本项目方案门槛:   0.575 / (60 - 4.5) = 1.0% (1K 仅需 10 tokens 即正收益)</a:t>
             </a:r>
             <a:br/>
             <a:r>

--- a/kvcache/unified_kv_memory/统一异构KVCache存储池_第一方推理基础设施立项汇报_10页精美图表增强版_预审版_20260814.pptx
+++ b/kvcache/unified_kv_memory/统一异构KVCache存储池_第一方推理基础设施立项汇报_10页精美图表增强版_预审版_20260814.pptx
@@ -5423,7 +5423,7 @@
               </a:defRPr>
             </a:pPr>
             <a:r>
-              <a:t>规划 4～5 周敏捷验证，包含 8 项核心验证 (PVT) 与 3 项可行性证伪 (CVT)，按四个核心验证阶段 (E0～E3) 门禁逐级推进</a:t>
+              <a:t>规划 4～5 周敏捷验证，包含 10 项必做验证 (PVT) 与 1 项可行性证伪 (CVT)，按四个核心验证阶段 (E0～E3) 门禁逐级推进</a:t>
             </a:r>
           </a:p>
         </p:txBody>
@@ -5934,7 +5934,7 @@
               </a:defRPr>
             </a:pPr>
             <a:r>
-              <a:t>▶ E0/E1 阶段目标：</a:t>
+              <a:t>▶ DPU 双轨协同 (PVT-09)：</a:t>
             </a:r>
             <a:r>
               <a:rPr sz="1100" b="0">
@@ -5943,7 +5943,7 @@
                 </a:solidFill>
                 <a:latin typeface="Microsoft YaHei"/>
               </a:rPr>
-              <a:t>确认业务复用收益空间，打通通信观测闭环。</a:t>
+              <a:t>DPU 卸载加速与 &lt;500µs 无缝降级。</a:t>
             </a:r>
           </a:p>
         </p:txBody>
@@ -6074,7 +6074,7 @@
               </a:defRPr>
             </a:pPr>
             <a:r>
-              <a:t>▶ 共享总线快路径 (PVT-03)：</a:t>
+              <a:t>▶ 远端直读边界 (PVT-03)：</a:t>
             </a:r>
             <a:r>
               <a:rPr sz="1100" b="0">
@@ -6083,7 +6083,7 @@
                 </a:solidFill>
                 <a:latin typeface="Microsoft YaHei"/>
               </a:rPr>
-              <a:t>验证 UBMEM 快路径，保持微秒级响应。</a:t>
+              <a:t>测定重读边界，ViewGuard 容错回滚。</a:t>
             </a:r>
           </a:p>
           <a:p>
@@ -6111,7 +6111,7 @@
                 </a:solidFill>
                 <a:latin typeface="Microsoft YaHei"/>
               </a:rPr>
-              <a:t>验证微秒级选路决策，决策准确率 &gt; 95%。</a:t>
+              <a:t>验证微秒级选路决策，决策准确率 &gt; 90%。</a:t>
             </a:r>
           </a:p>
         </p:txBody>
@@ -6195,7 +6195,7 @@
               </a:defRPr>
             </a:pPr>
             <a:r>
-              <a:t>分层容量与消费资格 (E2 阶段)</a:t>
+              <a:t>分层容量与消费资格 (E1 / E2 阶段)</a:t>
             </a:r>
           </a:p>
           <a:p>
@@ -6270,7 +6270,7 @@
               </a:defRPr>
             </a:pPr>
             <a:r>
-              <a:t>▶ E2 阶段目标：</a:t>
+              <a:t>▶ 组播分发验证 (PVT-08)：</a:t>
             </a:r>
             <a:r>
               <a:rPr sz="1100" b="0">
@@ -6279,7 +6279,7 @@
                 </a:solidFill>
                 <a:latin typeface="Microsoft YaHei"/>
               </a:rPr>
-              <a:t>分层扩容收益成立，多租户隔离达标。</a:t>
+              <a:t>1-to-N 软件中继组播，源端带宽降 ≥60%。</a:t>
             </a:r>
           </a:p>
         </p:txBody>
@@ -6410,7 +6410,7 @@
               </a:defRPr>
             </a:pPr>
             <a:r>
-              <a:t>▶ 3 项架构证伪 (CVT)：</a:t>
+              <a:t>▶ 软件 RCU 证伪 (CVT-01)：</a:t>
             </a:r>
             <a:r>
               <a:rPr sz="1100" b="0">
@@ -6419,7 +6419,7 @@
                 </a:solidFill>
                 <a:latin typeface="Microsoft YaHei"/>
               </a:rPr>
-              <a:t>多播/迁移/DPU 卸载证伪确立主路径。</a:t>
+              <a:t>验证软件 RCU 显存整理，证伪专用芯片。</a:t>
             </a:r>
           </a:p>
           <a:p>
